--- a/chapter3/chapter3.pptx
+++ b/chapter3/chapter3.pptx
@@ -11213,10 +11213,12 @@
           </a:bodyPr>
           <a:lstStyle/>
           <a:p>
-            <a:pPr>
-              <a:spcAft>
-                <a:spcPts val="1000"/>
-              </a:spcAft>
+            <a:pPr lvl="0" marL="457200" indent="-228600">
+              <a:buFont typeface="Calibri"/>
+              <a:spcAft>
+                <a:spcPts val="1000"/>
+              </a:spcAft>
+              <a:buSzPct val="100000"/>
               <a:buChar char="•"/>
               <a:lnSpc>
                 <a:spcPts val="2200"/>
@@ -11233,10 +11235,12 @@
             </a:r>
           </a:p>
           <a:p>
-            <a:pPr>
-              <a:spcAft>
-                <a:spcPts val="1000"/>
-              </a:spcAft>
+            <a:pPr lvl="0" marL="457200" indent="-228600">
+              <a:buFont typeface="Calibri"/>
+              <a:spcAft>
+                <a:spcPts val="1000"/>
+              </a:spcAft>
+              <a:buSzPct val="100000"/>
               <a:buChar char="•"/>
               <a:lnSpc>
                 <a:spcPts val="2200"/>
@@ -11372,10 +11376,12 @@
           </a:bodyPr>
           <a:lstStyle/>
           <a:p>
-            <a:pPr>
-              <a:spcAft>
-                <a:spcPts val="1000"/>
-              </a:spcAft>
+            <a:pPr lvl="0" marL="457200" indent="-228600">
+              <a:buFont typeface="Calibri"/>
+              <a:spcAft>
+                <a:spcPts val="1000"/>
+              </a:spcAft>
+              <a:buSzPct val="100000"/>
               <a:buChar char="•"/>
               <a:lnSpc>
                 <a:spcPts val="2200"/>
@@ -11392,10 +11398,12 @@
             </a:r>
           </a:p>
           <a:p>
-            <a:pPr>
-              <a:spcAft>
-                <a:spcPts val="1000"/>
-              </a:spcAft>
+            <a:pPr lvl="0" marL="457200" indent="-228600">
+              <a:buFont typeface="Calibri"/>
+              <a:spcAft>
+                <a:spcPts val="1000"/>
+              </a:spcAft>
+              <a:buSzPct val="100000"/>
               <a:buChar char="•"/>
               <a:lnSpc>
                 <a:spcPts val="2200"/>
@@ -11531,10 +11539,12 @@
           </a:bodyPr>
           <a:lstStyle/>
           <a:p>
-            <a:pPr>
-              <a:spcAft>
-                <a:spcPts val="1000"/>
-              </a:spcAft>
+            <a:pPr lvl="0" marL="457200" indent="-228600">
+              <a:buFont typeface="Calibri"/>
+              <a:spcAft>
+                <a:spcPts val="1000"/>
+              </a:spcAft>
+              <a:buSzPct val="100000"/>
               <a:buChar char="•"/>
               <a:lnSpc>
                 <a:spcPts val="2200"/>
@@ -11551,10 +11561,12 @@
             </a:r>
           </a:p>
           <a:p>
-            <a:pPr>
-              <a:spcAft>
-                <a:spcPts val="1000"/>
-              </a:spcAft>
+            <a:pPr lvl="0" marL="457200" indent="-228600">
+              <a:buFont typeface="Calibri"/>
+              <a:spcAft>
+                <a:spcPts val="1000"/>
+              </a:spcAft>
+              <a:buSzPct val="100000"/>
               <a:buChar char="•"/>
               <a:lnSpc>
                 <a:spcPts val="2200"/>
@@ -11571,10 +11583,12 @@
             </a:r>
           </a:p>
           <a:p>
-            <a:pPr>
-              <a:spcAft>
-                <a:spcPts val="1000"/>
-              </a:spcAft>
+            <a:pPr lvl="0" marL="457200" indent="-228600">
+              <a:buFont typeface="Calibri"/>
+              <a:spcAft>
+                <a:spcPts val="1000"/>
+              </a:spcAft>
+              <a:buSzPct val="100000"/>
               <a:buChar char="•"/>
               <a:lnSpc>
                 <a:spcPts val="2200"/>
@@ -11710,10 +11724,12 @@
           </a:bodyPr>
           <a:lstStyle/>
           <a:p>
-            <a:pPr>
-              <a:spcAft>
-                <a:spcPts val="1000"/>
-              </a:spcAft>
+            <a:pPr lvl="0" marL="457200" indent="-228600">
+              <a:buFont typeface="Calibri"/>
+              <a:spcAft>
+                <a:spcPts val="1000"/>
+              </a:spcAft>
+              <a:buSzPct val="100000"/>
               <a:buChar char="•"/>
               <a:lnSpc>
                 <a:spcPts val="2200"/>
@@ -11730,10 +11746,12 @@
             </a:r>
           </a:p>
           <a:p>
-            <a:pPr>
-              <a:spcAft>
-                <a:spcPts val="1000"/>
-              </a:spcAft>
+            <a:pPr lvl="0" marL="457200" indent="-228600">
+              <a:buFont typeface="Calibri"/>
+              <a:spcAft>
+                <a:spcPts val="1000"/>
+              </a:spcAft>
+              <a:buSzPct val="100000"/>
               <a:buChar char="•"/>
               <a:lnSpc>
                 <a:spcPts val="2200"/>
@@ -11750,10 +11768,12 @@
             </a:r>
           </a:p>
           <a:p>
-            <a:pPr>
-              <a:spcAft>
-                <a:spcPts val="1000"/>
-              </a:spcAft>
+            <a:pPr lvl="0" marL="457200" indent="-228600">
+              <a:buFont typeface="Calibri"/>
+              <a:spcAft>
+                <a:spcPts val="1000"/>
+              </a:spcAft>
+              <a:buSzPct val="100000"/>
               <a:buChar char="•"/>
               <a:lnSpc>
                 <a:spcPts val="2200"/>
@@ -11770,10 +11790,12 @@
             </a:r>
           </a:p>
           <a:p>
-            <a:pPr>
-              <a:spcAft>
-                <a:spcPts val="1000"/>
-              </a:spcAft>
+            <a:pPr lvl="0" marL="457200" indent="-228600">
+              <a:buFont typeface="Calibri"/>
+              <a:spcAft>
+                <a:spcPts val="1000"/>
+              </a:spcAft>
+              <a:buSzPct val="100000"/>
               <a:buChar char="•"/>
               <a:lnSpc>
                 <a:spcPts val="2200"/>
@@ -11909,10 +11931,12 @@
           </a:bodyPr>
           <a:lstStyle/>
           <a:p>
-            <a:pPr>
-              <a:spcAft>
-                <a:spcPts val="1000"/>
-              </a:spcAft>
+            <a:pPr lvl="0" marL="457200" indent="-228600">
+              <a:buFont typeface="Calibri"/>
+              <a:spcAft>
+                <a:spcPts val="1000"/>
+              </a:spcAft>
+              <a:buSzPct val="100000"/>
               <a:buChar char="•"/>
               <a:lnSpc>
                 <a:spcPts val="2200"/>
@@ -11929,10 +11953,12 @@
             </a:r>
           </a:p>
           <a:p>
-            <a:pPr>
-              <a:spcAft>
-                <a:spcPts val="1000"/>
-              </a:spcAft>
+            <a:pPr lvl="0" marL="457200" indent="-228600">
+              <a:buFont typeface="Calibri"/>
+              <a:spcAft>
+                <a:spcPts val="1000"/>
+              </a:spcAft>
+              <a:buSzPct val="100000"/>
               <a:buChar char="•"/>
               <a:lnSpc>
                 <a:spcPts val="2200"/>
@@ -12068,10 +12094,12 @@
           </a:bodyPr>
           <a:lstStyle/>
           <a:p>
-            <a:pPr>
-              <a:spcAft>
-                <a:spcPts val="1000"/>
-              </a:spcAft>
+            <a:pPr lvl="0" marL="457200" indent="-228600">
+              <a:buFont typeface="Calibri"/>
+              <a:spcAft>
+                <a:spcPts val="1000"/>
+              </a:spcAft>
+              <a:buSzPct val="100000"/>
               <a:buChar char="•"/>
               <a:lnSpc>
                 <a:spcPts val="2200"/>
@@ -12088,10 +12116,12 @@
             </a:r>
           </a:p>
           <a:p>
-            <a:pPr>
-              <a:spcAft>
-                <a:spcPts val="1000"/>
-              </a:spcAft>
+            <a:pPr lvl="0" marL="457200" indent="-228600">
+              <a:buFont typeface="Calibri"/>
+              <a:spcAft>
+                <a:spcPts val="1000"/>
+              </a:spcAft>
+              <a:buSzPct val="100000"/>
               <a:buChar char="•"/>
               <a:lnSpc>
                 <a:spcPts val="2200"/>
@@ -12108,10 +12138,12 @@
             </a:r>
           </a:p>
           <a:p>
-            <a:pPr>
-              <a:spcAft>
-                <a:spcPts val="1000"/>
-              </a:spcAft>
+            <a:pPr lvl="0" marL="457200" indent="-228600">
+              <a:buFont typeface="Calibri"/>
+              <a:spcAft>
+                <a:spcPts val="1000"/>
+              </a:spcAft>
+              <a:buSzPct val="100000"/>
               <a:buChar char="•"/>
               <a:lnSpc>
                 <a:spcPts val="2200"/>
@@ -12128,10 +12160,12 @@
             </a:r>
           </a:p>
           <a:p>
-            <a:pPr>
-              <a:spcAft>
-                <a:spcPts val="1000"/>
-              </a:spcAft>
+            <a:pPr lvl="0" marL="457200" indent="-228600">
+              <a:buFont typeface="Calibri"/>
+              <a:spcAft>
+                <a:spcPts val="1000"/>
+              </a:spcAft>
+              <a:buSzPct val="100000"/>
               <a:buChar char="•"/>
               <a:lnSpc>
                 <a:spcPts val="2200"/>
@@ -12267,10 +12301,12 @@
           </a:bodyPr>
           <a:lstStyle/>
           <a:p>
-            <a:pPr>
-              <a:spcAft>
-                <a:spcPts val="1000"/>
-              </a:spcAft>
+            <a:pPr lvl="0" marL="457200" indent="-228600">
+              <a:buFont typeface="Calibri"/>
+              <a:spcAft>
+                <a:spcPts val="1000"/>
+              </a:spcAft>
+              <a:buSzPct val="100000"/>
               <a:buChar char="•"/>
               <a:lnSpc>
                 <a:spcPts val="2200"/>
@@ -12287,10 +12323,12 @@
             </a:r>
           </a:p>
           <a:p>
-            <a:pPr>
-              <a:spcAft>
-                <a:spcPts val="1000"/>
-              </a:spcAft>
+            <a:pPr lvl="0" marL="457200" indent="-228600">
+              <a:buFont typeface="Calibri"/>
+              <a:spcAft>
+                <a:spcPts val="1000"/>
+              </a:spcAft>
+              <a:buSzPct val="100000"/>
               <a:buChar char="•"/>
               <a:lnSpc>
                 <a:spcPts val="2200"/>
@@ -12307,10 +12345,12 @@
             </a:r>
           </a:p>
           <a:p>
-            <a:pPr>
-              <a:spcAft>
-                <a:spcPts val="1000"/>
-              </a:spcAft>
+            <a:pPr lvl="0" marL="457200" indent="-228600">
+              <a:buFont typeface="Calibri"/>
+              <a:spcAft>
+                <a:spcPts val="1000"/>
+              </a:spcAft>
+              <a:buSzPct val="100000"/>
               <a:buChar char="•"/>
               <a:lnSpc>
                 <a:spcPts val="2200"/>
@@ -12446,10 +12486,12 @@
           </a:bodyPr>
           <a:lstStyle/>
           <a:p>
-            <a:pPr>
-              <a:spcAft>
-                <a:spcPts val="1000"/>
-              </a:spcAft>
+            <a:pPr lvl="0" marL="457200" indent="-228600">
+              <a:buFont typeface="Calibri"/>
+              <a:spcAft>
+                <a:spcPts val="1000"/>
+              </a:spcAft>
+              <a:buSzPct val="100000"/>
               <a:buChar char="•"/>
               <a:lnSpc>
                 <a:spcPts val="2200"/>
@@ -12466,10 +12508,12 @@
             </a:r>
           </a:p>
           <a:p>
-            <a:pPr>
-              <a:spcAft>
-                <a:spcPts val="1000"/>
-              </a:spcAft>
+            <a:pPr lvl="0" marL="457200" indent="-228600">
+              <a:buFont typeface="Calibri"/>
+              <a:spcAft>
+                <a:spcPts val="1000"/>
+              </a:spcAft>
+              <a:buSzPct val="100000"/>
               <a:buChar char="•"/>
               <a:lnSpc>
                 <a:spcPts val="2200"/>
@@ -12486,10 +12530,12 @@
             </a:r>
           </a:p>
           <a:p>
-            <a:pPr>
-              <a:spcAft>
-                <a:spcPts val="1000"/>
-              </a:spcAft>
+            <a:pPr lvl="0" marL="457200" indent="-228600">
+              <a:buFont typeface="Calibri"/>
+              <a:spcAft>
+                <a:spcPts val="1000"/>
+              </a:spcAft>
+              <a:buSzPct val="100000"/>
               <a:buChar char="•"/>
               <a:lnSpc>
                 <a:spcPts val="2200"/>
@@ -12625,10 +12671,12 @@
           </a:bodyPr>
           <a:lstStyle/>
           <a:p>
-            <a:pPr>
-              <a:spcAft>
-                <a:spcPts val="1000"/>
-              </a:spcAft>
+            <a:pPr lvl="0" marL="457200" indent="-228600">
+              <a:buFont typeface="Calibri"/>
+              <a:spcAft>
+                <a:spcPts val="1000"/>
+              </a:spcAft>
+              <a:buSzPct val="100000"/>
               <a:buChar char="•"/>
               <a:lnSpc>
                 <a:spcPts val="2200"/>
@@ -12645,10 +12693,12 @@
             </a:r>
           </a:p>
           <a:p>
-            <a:pPr>
-              <a:spcAft>
-                <a:spcPts val="1000"/>
-              </a:spcAft>
+            <a:pPr lvl="0" marL="457200" indent="-228600">
+              <a:buFont typeface="Calibri"/>
+              <a:spcAft>
+                <a:spcPts val="1000"/>
+              </a:spcAft>
+              <a:buSzPct val="100000"/>
               <a:buChar char="•"/>
               <a:lnSpc>
                 <a:spcPts val="2200"/>
@@ -12784,10 +12834,12 @@
           </a:bodyPr>
           <a:lstStyle/>
           <a:p>
-            <a:pPr>
-              <a:spcAft>
-                <a:spcPts val="1000"/>
-              </a:spcAft>
+            <a:pPr lvl="0" marL="457200" indent="-228600">
+              <a:buFont typeface="Calibri"/>
+              <a:spcAft>
+                <a:spcPts val="1000"/>
+              </a:spcAft>
+              <a:buSzPct val="100000"/>
               <a:buChar char="•"/>
               <a:lnSpc>
                 <a:spcPts val="2200"/>
@@ -12804,10 +12856,12 @@
             </a:r>
           </a:p>
           <a:p>
-            <a:pPr>
-              <a:spcAft>
-                <a:spcPts val="1000"/>
-              </a:spcAft>
+            <a:pPr lvl="0" marL="457200" indent="-228600">
+              <a:buFont typeface="Calibri"/>
+              <a:spcAft>
+                <a:spcPts val="1000"/>
+              </a:spcAft>
+              <a:buSzPct val="100000"/>
               <a:buChar char="•"/>
               <a:lnSpc>
                 <a:spcPts val="2200"/>
@@ -12824,10 +12878,12 @@
             </a:r>
           </a:p>
           <a:p>
-            <a:pPr>
-              <a:spcAft>
-                <a:spcPts val="1000"/>
-              </a:spcAft>
+            <a:pPr lvl="0" marL="457200" indent="-228600">
+              <a:buFont typeface="Calibri"/>
+              <a:spcAft>
+                <a:spcPts val="1000"/>
+              </a:spcAft>
+              <a:buSzPct val="100000"/>
               <a:buChar char="•"/>
               <a:lnSpc>
                 <a:spcPts val="2200"/>
@@ -12844,10 +12900,12 @@
             </a:r>
           </a:p>
           <a:p>
-            <a:pPr>
-              <a:spcAft>
-                <a:spcPts val="1000"/>
-              </a:spcAft>
+            <a:pPr lvl="0" marL="457200" indent="-228600">
+              <a:buFont typeface="Calibri"/>
+              <a:spcAft>
+                <a:spcPts val="1000"/>
+              </a:spcAft>
+              <a:buSzPct val="100000"/>
               <a:buChar char="•"/>
               <a:lnSpc>
                 <a:spcPts val="2200"/>
@@ -12864,10 +12922,12 @@
             </a:r>
           </a:p>
           <a:p>
-            <a:pPr>
-              <a:spcAft>
-                <a:spcPts val="1000"/>
-              </a:spcAft>
+            <a:pPr lvl="0" marL="457200" indent="-228600">
+              <a:buFont typeface="Calibri"/>
+              <a:spcAft>
+                <a:spcPts val="1000"/>
+              </a:spcAft>
+              <a:buSzPct val="100000"/>
               <a:buChar char="•"/>
               <a:lnSpc>
                 <a:spcPts val="2200"/>
@@ -13003,10 +13063,12 @@
           </a:bodyPr>
           <a:lstStyle/>
           <a:p>
-            <a:pPr>
-              <a:spcAft>
-                <a:spcPts val="1000"/>
-              </a:spcAft>
+            <a:pPr lvl="0" marL="457200" indent="-228600">
+              <a:buFont typeface="Calibri"/>
+              <a:spcAft>
+                <a:spcPts val="1000"/>
+              </a:spcAft>
+              <a:buSzPct val="100000"/>
               <a:buChar char="•"/>
               <a:lnSpc>
                 <a:spcPts val="2200"/>
@@ -13023,10 +13085,12 @@
             </a:r>
           </a:p>
           <a:p>
-            <a:pPr>
-              <a:spcAft>
-                <a:spcPts val="1000"/>
-              </a:spcAft>
+            <a:pPr lvl="0" marL="457200" indent="-228600">
+              <a:buFont typeface="Calibri"/>
+              <a:spcAft>
+                <a:spcPts val="1000"/>
+              </a:spcAft>
+              <a:buSzPct val="100000"/>
               <a:buChar char="•"/>
               <a:lnSpc>
                 <a:spcPts val="2200"/>
@@ -13043,10 +13107,12 @@
             </a:r>
           </a:p>
           <a:p>
-            <a:pPr>
-              <a:spcAft>
-                <a:spcPts val="1000"/>
-              </a:spcAft>
+            <a:pPr lvl="0" marL="457200" indent="-228600">
+              <a:buFont typeface="Calibri"/>
+              <a:spcAft>
+                <a:spcPts val="1000"/>
+              </a:spcAft>
+              <a:buSzPct val="100000"/>
               <a:buChar char="•"/>
               <a:lnSpc>
                 <a:spcPts val="2200"/>
@@ -13182,10 +13248,12 @@
           </a:bodyPr>
           <a:lstStyle/>
           <a:p>
-            <a:pPr>
-              <a:spcAft>
-                <a:spcPts val="1000"/>
-              </a:spcAft>
+            <a:pPr lvl="0" marL="457200" indent="-228600">
+              <a:buFont typeface="Calibri"/>
+              <a:spcAft>
+                <a:spcPts val="1000"/>
+              </a:spcAft>
+              <a:buSzPct val="100000"/>
               <a:buChar char="•"/>
               <a:lnSpc>
                 <a:spcPts val="2200"/>
@@ -13202,10 +13270,12 @@
             </a:r>
           </a:p>
           <a:p>
-            <a:pPr>
-              <a:spcAft>
-                <a:spcPts val="1000"/>
-              </a:spcAft>
+            <a:pPr lvl="0" marL="457200" indent="-228600">
+              <a:buFont typeface="Calibri"/>
+              <a:spcAft>
+                <a:spcPts val="1000"/>
+              </a:spcAft>
+              <a:buSzPct val="100000"/>
               <a:buChar char="•"/>
               <a:lnSpc>
                 <a:spcPts val="2200"/>
@@ -13222,10 +13292,12 @@
             </a:r>
           </a:p>
           <a:p>
-            <a:pPr>
-              <a:spcAft>
-                <a:spcPts val="1000"/>
-              </a:spcAft>
+            <a:pPr lvl="0" marL="457200" indent="-228600">
+              <a:buFont typeface="Calibri"/>
+              <a:spcAft>
+                <a:spcPts val="1000"/>
+              </a:spcAft>
+              <a:buSzPct val="100000"/>
               <a:buChar char="•"/>
               <a:lnSpc>
                 <a:spcPts val="2200"/>
@@ -13242,10 +13314,12 @@
             </a:r>
           </a:p>
           <a:p>
-            <a:pPr>
-              <a:spcAft>
-                <a:spcPts val="1000"/>
-              </a:spcAft>
+            <a:pPr lvl="0" marL="457200" indent="-228600">
+              <a:buFont typeface="Calibri"/>
+              <a:spcAft>
+                <a:spcPts val="1000"/>
+              </a:spcAft>
+              <a:buSzPct val="100000"/>
               <a:buChar char="•"/>
               <a:lnSpc>
                 <a:spcPts val="2200"/>
@@ -13381,10 +13455,12 @@
           </a:bodyPr>
           <a:lstStyle/>
           <a:p>
-            <a:pPr>
-              <a:spcAft>
-                <a:spcPts val="1000"/>
-              </a:spcAft>
+            <a:pPr lvl="0" marL="457200" indent="-228600">
+              <a:buFont typeface="Calibri"/>
+              <a:spcAft>
+                <a:spcPts val="1000"/>
+              </a:spcAft>
+              <a:buSzPct val="100000"/>
               <a:buChar char="•"/>
               <a:lnSpc>
                 <a:spcPts val="2200"/>
@@ -13401,10 +13477,12 @@
             </a:r>
           </a:p>
           <a:p>
-            <a:pPr>
-              <a:spcAft>
-                <a:spcPts val="1000"/>
-              </a:spcAft>
+            <a:pPr lvl="0" marL="457200" indent="-228600">
+              <a:buFont typeface="Calibri"/>
+              <a:spcAft>
+                <a:spcPts val="1000"/>
+              </a:spcAft>
+              <a:buSzPct val="100000"/>
               <a:buChar char="•"/>
               <a:lnSpc>
                 <a:spcPts val="2200"/>
@@ -13421,10 +13499,12 @@
             </a:r>
           </a:p>
           <a:p>
-            <a:pPr>
-              <a:spcAft>
-                <a:spcPts val="1000"/>
-              </a:spcAft>
+            <a:pPr lvl="0" marL="457200" indent="-228600">
+              <a:buFont typeface="Calibri"/>
+              <a:spcAft>
+                <a:spcPts val="1000"/>
+              </a:spcAft>
+              <a:buSzPct val="100000"/>
               <a:buChar char="•"/>
               <a:lnSpc>
                 <a:spcPts val="2200"/>
@@ -13560,10 +13640,12 @@
           </a:bodyPr>
           <a:lstStyle/>
           <a:p>
-            <a:pPr>
-              <a:spcAft>
-                <a:spcPts val="1000"/>
-              </a:spcAft>
+            <a:pPr lvl="0" marL="457200" indent="-228600">
+              <a:buFont typeface="Calibri"/>
+              <a:spcAft>
+                <a:spcPts val="1000"/>
+              </a:spcAft>
+              <a:buSzPct val="100000"/>
               <a:buChar char="•"/>
               <a:lnSpc>
                 <a:spcPts val="2200"/>
@@ -13580,10 +13662,12 @@
             </a:r>
           </a:p>
           <a:p>
-            <a:pPr>
-              <a:spcAft>
-                <a:spcPts val="1000"/>
-              </a:spcAft>
+            <a:pPr lvl="0" marL="457200" indent="-228600">
+              <a:buFont typeface="Calibri"/>
+              <a:spcAft>
+                <a:spcPts val="1000"/>
+              </a:spcAft>
+              <a:buSzPct val="100000"/>
               <a:buChar char="•"/>
               <a:lnSpc>
                 <a:spcPts val="2200"/>
@@ -13600,10 +13684,12 @@
             </a:r>
           </a:p>
           <a:p>
-            <a:pPr>
-              <a:spcAft>
-                <a:spcPts val="1000"/>
-              </a:spcAft>
+            <a:pPr lvl="0" marL="457200" indent="-228600">
+              <a:buFont typeface="Calibri"/>
+              <a:spcAft>
+                <a:spcPts val="1000"/>
+              </a:spcAft>
+              <a:buSzPct val="100000"/>
               <a:buChar char="•"/>
               <a:lnSpc>
                 <a:spcPts val="2200"/>
@@ -13620,10 +13706,12 @@
             </a:r>
           </a:p>
           <a:p>
-            <a:pPr>
-              <a:spcAft>
-                <a:spcPts val="1000"/>
-              </a:spcAft>
+            <a:pPr lvl="0" marL="457200" indent="-228600">
+              <a:buFont typeface="Calibri"/>
+              <a:spcAft>
+                <a:spcPts val="1000"/>
+              </a:spcAft>
+              <a:buSzPct val="100000"/>
               <a:buChar char="•"/>
               <a:lnSpc>
                 <a:spcPts val="2200"/>
@@ -13640,10 +13728,12 @@
             </a:r>
           </a:p>
           <a:p>
-            <a:pPr>
-              <a:spcAft>
-                <a:spcPts val="1000"/>
-              </a:spcAft>
+            <a:pPr lvl="0" marL="457200" indent="-228600">
+              <a:buFont typeface="Calibri"/>
+              <a:spcAft>
+                <a:spcPts val="1000"/>
+              </a:spcAft>
+              <a:buSzPct val="100000"/>
               <a:buChar char="•"/>
               <a:lnSpc>
                 <a:spcPts val="2200"/>
@@ -13779,10 +13869,12 @@
           </a:bodyPr>
           <a:lstStyle/>
           <a:p>
-            <a:pPr>
-              <a:spcAft>
-                <a:spcPts val="1000"/>
-              </a:spcAft>
+            <a:pPr lvl="0" marL="457200" indent="-228600">
+              <a:buFont typeface="Calibri"/>
+              <a:spcAft>
+                <a:spcPts val="1000"/>
+              </a:spcAft>
+              <a:buSzPct val="100000"/>
               <a:buChar char="•"/>
               <a:lnSpc>
                 <a:spcPts val="2200"/>
@@ -13799,10 +13891,12 @@
             </a:r>
           </a:p>
           <a:p>
-            <a:pPr>
-              <a:spcAft>
-                <a:spcPts val="1000"/>
-              </a:spcAft>
+            <a:pPr lvl="0" marL="457200" indent="-228600">
+              <a:buFont typeface="Calibri"/>
+              <a:spcAft>
+                <a:spcPts val="1000"/>
+              </a:spcAft>
+              <a:buSzPct val="100000"/>
               <a:buChar char="•"/>
               <a:lnSpc>
                 <a:spcPts val="2200"/>
@@ -13819,10 +13913,12 @@
             </a:r>
           </a:p>
           <a:p>
-            <a:pPr>
-              <a:spcAft>
-                <a:spcPts val="1000"/>
-              </a:spcAft>
+            <a:pPr lvl="0" marL="457200" indent="-228600">
+              <a:buFont typeface="Calibri"/>
+              <a:spcAft>
+                <a:spcPts val="1000"/>
+              </a:spcAft>
+              <a:buSzPct val="100000"/>
               <a:buChar char="•"/>
               <a:lnSpc>
                 <a:spcPts val="2200"/>
@@ -13958,10 +14054,12 @@
           </a:bodyPr>
           <a:lstStyle/>
           <a:p>
-            <a:pPr>
-              <a:spcAft>
-                <a:spcPts val="1000"/>
-              </a:spcAft>
+            <a:pPr lvl="0" marL="457200" indent="-228600">
+              <a:buFont typeface="Calibri"/>
+              <a:spcAft>
+                <a:spcPts val="1000"/>
+              </a:spcAft>
+              <a:buSzPct val="100000"/>
               <a:buChar char="•"/>
               <a:lnSpc>
                 <a:spcPts val="2200"/>
@@ -13978,10 +14076,12 @@
             </a:r>
           </a:p>
           <a:p>
-            <a:pPr>
-              <a:spcAft>
-                <a:spcPts val="1000"/>
-              </a:spcAft>
+            <a:pPr lvl="0" marL="457200" indent="-228600">
+              <a:buFont typeface="Calibri"/>
+              <a:spcAft>
+                <a:spcPts val="1000"/>
+              </a:spcAft>
+              <a:buSzPct val="100000"/>
               <a:buChar char="•"/>
               <a:lnSpc>
                 <a:spcPts val="2200"/>
@@ -13998,10 +14098,12 @@
             </a:r>
           </a:p>
           <a:p>
-            <a:pPr>
-              <a:spcAft>
-                <a:spcPts val="1000"/>
-              </a:spcAft>
+            <a:pPr lvl="0" marL="457200" indent="-228600">
+              <a:buFont typeface="Calibri"/>
+              <a:spcAft>
+                <a:spcPts val="1000"/>
+              </a:spcAft>
+              <a:buSzPct val="100000"/>
               <a:buChar char="•"/>
               <a:lnSpc>
                 <a:spcPts val="2200"/>
@@ -14137,10 +14239,12 @@
           </a:bodyPr>
           <a:lstStyle/>
           <a:p>
-            <a:pPr>
-              <a:spcAft>
-                <a:spcPts val="1000"/>
-              </a:spcAft>
+            <a:pPr lvl="0" marL="457200" indent="-228600">
+              <a:buFont typeface="Calibri"/>
+              <a:spcAft>
+                <a:spcPts val="1000"/>
+              </a:spcAft>
+              <a:buSzPct val="100000"/>
               <a:buChar char="•"/>
               <a:lnSpc>
                 <a:spcPts val="2200"/>
@@ -14157,10 +14261,12 @@
             </a:r>
           </a:p>
           <a:p>
-            <a:pPr>
-              <a:spcAft>
-                <a:spcPts val="1000"/>
-              </a:spcAft>
+            <a:pPr lvl="0" marL="457200" indent="-228600">
+              <a:buFont typeface="Calibri"/>
+              <a:spcAft>
+                <a:spcPts val="1000"/>
+              </a:spcAft>
+              <a:buSzPct val="100000"/>
               <a:buChar char="•"/>
               <a:lnSpc>
                 <a:spcPts val="2200"/>
@@ -14177,10 +14283,12 @@
             </a:r>
           </a:p>
           <a:p>
-            <a:pPr>
-              <a:spcAft>
-                <a:spcPts val="1000"/>
-              </a:spcAft>
+            <a:pPr lvl="0" marL="457200" indent="-228600">
+              <a:buFont typeface="Calibri"/>
+              <a:spcAft>
+                <a:spcPts val="1000"/>
+              </a:spcAft>
+              <a:buSzPct val="100000"/>
               <a:buChar char="•"/>
               <a:lnSpc>
                 <a:spcPts val="2200"/>
@@ -14197,10 +14305,12 @@
             </a:r>
           </a:p>
           <a:p>
-            <a:pPr>
-              <a:spcAft>
-                <a:spcPts val="1000"/>
-              </a:spcAft>
+            <a:pPr lvl="0" marL="457200" indent="-228600">
+              <a:buFont typeface="Calibri"/>
+              <a:spcAft>
+                <a:spcPts val="1000"/>
+              </a:spcAft>
+              <a:buSzPct val="100000"/>
               <a:buChar char="•"/>
               <a:lnSpc>
                 <a:spcPts val="2200"/>
@@ -14336,10 +14446,12 @@
           </a:bodyPr>
           <a:lstStyle/>
           <a:p>
-            <a:pPr>
-              <a:spcAft>
-                <a:spcPts val="1000"/>
-              </a:spcAft>
+            <a:pPr lvl="0" marL="457200" indent="-228600">
+              <a:buFont typeface="Calibri"/>
+              <a:spcAft>
+                <a:spcPts val="1000"/>
+              </a:spcAft>
+              <a:buSzPct val="100000"/>
               <a:buChar char="•"/>
               <a:lnSpc>
                 <a:spcPts val="2200"/>
@@ -14356,10 +14468,12 @@
             </a:r>
           </a:p>
           <a:p>
-            <a:pPr>
-              <a:spcAft>
-                <a:spcPts val="1000"/>
-              </a:spcAft>
+            <a:pPr lvl="0" marL="457200" indent="-228600">
+              <a:buFont typeface="Calibri"/>
+              <a:spcAft>
+                <a:spcPts val="1000"/>
+              </a:spcAft>
+              <a:buSzPct val="100000"/>
               <a:buChar char="•"/>
               <a:lnSpc>
                 <a:spcPts val="2200"/>
@@ -14376,10 +14490,12 @@
             </a:r>
           </a:p>
           <a:p>
-            <a:pPr>
-              <a:spcAft>
-                <a:spcPts val="1000"/>
-              </a:spcAft>
+            <a:pPr lvl="0" marL="457200" indent="-228600">
+              <a:buFont typeface="Calibri"/>
+              <a:spcAft>
+                <a:spcPts val="1000"/>
+              </a:spcAft>
+              <a:buSzPct val="100000"/>
               <a:buChar char="•"/>
               <a:lnSpc>
                 <a:spcPts val="2200"/>
@@ -14396,10 +14512,12 @@
             </a:r>
           </a:p>
           <a:p>
-            <a:pPr>
-              <a:spcAft>
-                <a:spcPts val="1000"/>
-              </a:spcAft>
+            <a:pPr lvl="0" marL="457200" indent="-228600">
+              <a:buFont typeface="Calibri"/>
+              <a:spcAft>
+                <a:spcPts val="1000"/>
+              </a:spcAft>
+              <a:buSzPct val="100000"/>
               <a:buChar char="•"/>
               <a:lnSpc>
                 <a:spcPts val="2200"/>
@@ -14535,10 +14653,12 @@
           </a:bodyPr>
           <a:lstStyle/>
           <a:p>
-            <a:pPr>
-              <a:spcAft>
-                <a:spcPts val="1000"/>
-              </a:spcAft>
+            <a:pPr lvl="0" marL="457200" indent="-228600">
+              <a:buFont typeface="Calibri"/>
+              <a:spcAft>
+                <a:spcPts val="1000"/>
+              </a:spcAft>
+              <a:buSzPct val="100000"/>
               <a:buChar char="•"/>
               <a:lnSpc>
                 <a:spcPts val="2200"/>
@@ -14555,10 +14675,12 @@
             </a:r>
           </a:p>
           <a:p>
-            <a:pPr>
-              <a:spcAft>
-                <a:spcPts val="1000"/>
-              </a:spcAft>
+            <a:pPr lvl="0" marL="457200" indent="-228600">
+              <a:buFont typeface="Calibri"/>
+              <a:spcAft>
+                <a:spcPts val="1000"/>
+              </a:spcAft>
+              <a:buSzPct val="100000"/>
               <a:buChar char="•"/>
               <a:lnSpc>
                 <a:spcPts val="2200"/>
@@ -14694,10 +14816,12 @@
           </a:bodyPr>
           <a:lstStyle/>
           <a:p>
-            <a:pPr>
-              <a:spcAft>
-                <a:spcPts val="1000"/>
-              </a:spcAft>
+            <a:pPr lvl="0" marL="457200" indent="-228600">
+              <a:buFont typeface="Calibri"/>
+              <a:spcAft>
+                <a:spcPts val="1000"/>
+              </a:spcAft>
+              <a:buSzPct val="100000"/>
               <a:buChar char="•"/>
               <a:lnSpc>
                 <a:spcPts val="2200"/>
@@ -14714,10 +14838,12 @@
             </a:r>
           </a:p>
           <a:p>
-            <a:pPr>
-              <a:spcAft>
-                <a:spcPts val="1000"/>
-              </a:spcAft>
+            <a:pPr lvl="0" marL="457200" indent="-228600">
+              <a:buFont typeface="Calibri"/>
+              <a:spcAft>
+                <a:spcPts val="1000"/>
+              </a:spcAft>
+              <a:buSzPct val="100000"/>
               <a:buChar char="•"/>
               <a:lnSpc>
                 <a:spcPts val="2200"/>
@@ -14853,10 +14979,12 @@
           </a:bodyPr>
           <a:lstStyle/>
           <a:p>
-            <a:pPr>
-              <a:spcAft>
-                <a:spcPts val="1000"/>
-              </a:spcAft>
+            <a:pPr lvl="0" marL="457200" indent="-228600">
+              <a:buFont typeface="Calibri"/>
+              <a:spcAft>
+                <a:spcPts val="1000"/>
+              </a:spcAft>
+              <a:buSzPct val="100000"/>
               <a:buChar char="•"/>
               <a:lnSpc>
                 <a:spcPts val="2200"/>
@@ -14873,10 +15001,12 @@
             </a:r>
           </a:p>
           <a:p>
-            <a:pPr>
-              <a:spcAft>
-                <a:spcPts val="1000"/>
-              </a:spcAft>
+            <a:pPr lvl="0" marL="457200" indent="-228600">
+              <a:buFont typeface="Calibri"/>
+              <a:spcAft>
+                <a:spcPts val="1000"/>
+              </a:spcAft>
+              <a:buSzPct val="100000"/>
               <a:buChar char="•"/>
               <a:lnSpc>
                 <a:spcPts val="2200"/>
@@ -15012,10 +15142,12 @@
           </a:bodyPr>
           <a:lstStyle/>
           <a:p>
-            <a:pPr>
-              <a:spcAft>
-                <a:spcPts val="1000"/>
-              </a:spcAft>
+            <a:pPr lvl="0" marL="457200" indent="-228600">
+              <a:buFont typeface="Calibri"/>
+              <a:spcAft>
+                <a:spcPts val="1000"/>
+              </a:spcAft>
+              <a:buSzPct val="100000"/>
               <a:buChar char="•"/>
               <a:lnSpc>
                 <a:spcPts val="2200"/>
@@ -15032,10 +15164,12 @@
             </a:r>
           </a:p>
           <a:p>
-            <a:pPr>
-              <a:spcAft>
-                <a:spcPts val="1000"/>
-              </a:spcAft>
+            <a:pPr lvl="0" marL="457200" indent="-228600">
+              <a:buFont typeface="Calibri"/>
+              <a:spcAft>
+                <a:spcPts val="1000"/>
+              </a:spcAft>
+              <a:buSzPct val="100000"/>
               <a:buChar char="•"/>
               <a:lnSpc>
                 <a:spcPts val="2200"/>
@@ -15052,10 +15186,12 @@
             </a:r>
           </a:p>
           <a:p>
-            <a:pPr>
-              <a:spcAft>
-                <a:spcPts val="1000"/>
-              </a:spcAft>
+            <a:pPr lvl="0" marL="457200" indent="-228600">
+              <a:buFont typeface="Calibri"/>
+              <a:spcAft>
+                <a:spcPts val="1000"/>
+              </a:spcAft>
+              <a:buSzPct val="100000"/>
               <a:buChar char="•"/>
               <a:lnSpc>
                 <a:spcPts val="2200"/>
@@ -15191,10 +15327,12 @@
           </a:bodyPr>
           <a:lstStyle/>
           <a:p>
-            <a:pPr>
-              <a:spcAft>
-                <a:spcPts val="1000"/>
-              </a:spcAft>
+            <a:pPr lvl="0" marL="457200" indent="-228600">
+              <a:buFont typeface="Calibri"/>
+              <a:spcAft>
+                <a:spcPts val="1000"/>
+              </a:spcAft>
+              <a:buSzPct val="100000"/>
               <a:buChar char="•"/>
               <a:lnSpc>
                 <a:spcPts val="2200"/>
@@ -15211,10 +15349,12 @@
             </a:r>
           </a:p>
           <a:p>
-            <a:pPr>
-              <a:spcAft>
-                <a:spcPts val="1000"/>
-              </a:spcAft>
+            <a:pPr lvl="0" marL="457200" indent="-228600">
+              <a:buFont typeface="Calibri"/>
+              <a:spcAft>
+                <a:spcPts val="1000"/>
+              </a:spcAft>
+              <a:buSzPct val="100000"/>
               <a:buChar char="•"/>
               <a:lnSpc>
                 <a:spcPts val="2200"/>
@@ -15231,10 +15371,12 @@
             </a:r>
           </a:p>
           <a:p>
-            <a:pPr>
-              <a:spcAft>
-                <a:spcPts val="1000"/>
-              </a:spcAft>
+            <a:pPr lvl="0" marL="457200" indent="-228600">
+              <a:buFont typeface="Calibri"/>
+              <a:spcAft>
+                <a:spcPts val="1000"/>
+              </a:spcAft>
+              <a:buSzPct val="100000"/>
               <a:buChar char="•"/>
               <a:lnSpc>
                 <a:spcPts val="2200"/>
@@ -15251,10 +15393,12 @@
             </a:r>
           </a:p>
           <a:p>
-            <a:pPr>
-              <a:spcAft>
-                <a:spcPts val="1000"/>
-              </a:spcAft>
+            <a:pPr lvl="0" marL="457200" indent="-228600">
+              <a:buFont typeface="Calibri"/>
+              <a:spcAft>
+                <a:spcPts val="1000"/>
+              </a:spcAft>
+              <a:buSzPct val="100000"/>
               <a:buChar char="•"/>
               <a:lnSpc>
                 <a:spcPts val="2200"/>
@@ -15271,10 +15415,12 @@
             </a:r>
           </a:p>
           <a:p>
-            <a:pPr>
-              <a:spcAft>
-                <a:spcPts val="1000"/>
-              </a:spcAft>
+            <a:pPr lvl="0" marL="457200" indent="-228600">
+              <a:buFont typeface="Calibri"/>
+              <a:spcAft>
+                <a:spcPts val="1000"/>
+              </a:spcAft>
+              <a:buSzPct val="100000"/>
               <a:buChar char="•"/>
               <a:lnSpc>
                 <a:spcPts val="2200"/>
@@ -15291,10 +15437,12 @@
             </a:r>
           </a:p>
           <a:p>
-            <a:pPr>
-              <a:spcAft>
-                <a:spcPts val="1000"/>
-              </a:spcAft>
+            <a:pPr lvl="0" marL="457200" indent="-228600">
+              <a:buFont typeface="Calibri"/>
+              <a:spcAft>
+                <a:spcPts val="1000"/>
+              </a:spcAft>
+              <a:buSzPct val="100000"/>
               <a:buChar char="•"/>
               <a:lnSpc>
                 <a:spcPts val="2200"/>
@@ -15430,10 +15578,12 @@
           </a:bodyPr>
           <a:lstStyle/>
           <a:p>
-            <a:pPr>
-              <a:spcAft>
-                <a:spcPts val="1000"/>
-              </a:spcAft>
+            <a:pPr lvl="0" marL="457200" indent="-228600">
+              <a:buFont typeface="Calibri"/>
+              <a:spcAft>
+                <a:spcPts val="1000"/>
+              </a:spcAft>
+              <a:buSzPct val="100000"/>
               <a:buChar char="•"/>
               <a:lnSpc>
                 <a:spcPts val="2200"/>
@@ -15450,10 +15600,12 @@
             </a:r>
           </a:p>
           <a:p>
-            <a:pPr>
-              <a:spcAft>
-                <a:spcPts val="1000"/>
-              </a:spcAft>
+            <a:pPr lvl="0" marL="457200" indent="-228600">
+              <a:buFont typeface="Calibri"/>
+              <a:spcAft>
+                <a:spcPts val="1000"/>
+              </a:spcAft>
+              <a:buSzPct val="100000"/>
               <a:buChar char="•"/>
               <a:lnSpc>
                 <a:spcPts val="2200"/>
@@ -15470,10 +15622,12 @@
             </a:r>
           </a:p>
           <a:p>
-            <a:pPr>
-              <a:spcAft>
-                <a:spcPts val="1000"/>
-              </a:spcAft>
+            <a:pPr lvl="0" marL="457200" indent="-228600">
+              <a:buFont typeface="Calibri"/>
+              <a:spcAft>
+                <a:spcPts val="1000"/>
+              </a:spcAft>
+              <a:buSzPct val="100000"/>
               <a:buChar char="•"/>
               <a:lnSpc>
                 <a:spcPts val="2200"/>
@@ -15609,10 +15763,12 @@
           </a:bodyPr>
           <a:lstStyle/>
           <a:p>
-            <a:pPr>
-              <a:spcAft>
-                <a:spcPts val="1000"/>
-              </a:spcAft>
+            <a:pPr lvl="0" marL="457200" indent="-228600">
+              <a:buFont typeface="Calibri"/>
+              <a:spcAft>
+                <a:spcPts val="1000"/>
+              </a:spcAft>
+              <a:buSzPct val="100000"/>
               <a:buChar char="•"/>
               <a:lnSpc>
                 <a:spcPts val="2200"/>
@@ -15629,10 +15785,12 @@
             </a:r>
           </a:p>
           <a:p>
-            <a:pPr>
-              <a:spcAft>
-                <a:spcPts val="1000"/>
-              </a:spcAft>
+            <a:pPr lvl="0" marL="457200" indent="-228600">
+              <a:buFont typeface="Calibri"/>
+              <a:spcAft>
+                <a:spcPts val="1000"/>
+              </a:spcAft>
+              <a:buSzPct val="100000"/>
               <a:buChar char="•"/>
               <a:lnSpc>
                 <a:spcPts val="2200"/>
@@ -15649,10 +15807,12 @@
             </a:r>
           </a:p>
           <a:p>
-            <a:pPr>
-              <a:spcAft>
-                <a:spcPts val="1000"/>
-              </a:spcAft>
+            <a:pPr lvl="0" marL="457200" indent="-228600">
+              <a:buFont typeface="Calibri"/>
+              <a:spcAft>
+                <a:spcPts val="1000"/>
+              </a:spcAft>
+              <a:buSzPct val="100000"/>
               <a:buChar char="•"/>
               <a:lnSpc>
                 <a:spcPts val="2200"/>
@@ -15669,10 +15829,12 @@
             </a:r>
           </a:p>
           <a:p>
-            <a:pPr>
-              <a:spcAft>
-                <a:spcPts val="1000"/>
-              </a:spcAft>
+            <a:pPr lvl="0" marL="457200" indent="-228600">
+              <a:buFont typeface="Calibri"/>
+              <a:spcAft>
+                <a:spcPts val="1000"/>
+              </a:spcAft>
+              <a:buSzPct val="100000"/>
               <a:buChar char="•"/>
               <a:lnSpc>
                 <a:spcPts val="2200"/>
@@ -15689,10 +15851,12 @@
             </a:r>
           </a:p>
           <a:p>
-            <a:pPr>
-              <a:spcAft>
-                <a:spcPts val="1000"/>
-              </a:spcAft>
+            <a:pPr lvl="0" marL="457200" indent="-228600">
+              <a:buFont typeface="Calibri"/>
+              <a:spcAft>
+                <a:spcPts val="1000"/>
+              </a:spcAft>
+              <a:buSzPct val="100000"/>
               <a:buChar char="•"/>
               <a:lnSpc>
                 <a:spcPts val="2200"/>
@@ -15828,10 +15992,12 @@
           </a:bodyPr>
           <a:lstStyle/>
           <a:p>
-            <a:pPr>
-              <a:spcAft>
-                <a:spcPts val="1000"/>
-              </a:spcAft>
+            <a:pPr lvl="0" marL="457200" indent="-228600">
+              <a:buFont typeface="Calibri"/>
+              <a:spcAft>
+                <a:spcPts val="1000"/>
+              </a:spcAft>
+              <a:buSzPct val="100000"/>
               <a:buChar char="•"/>
               <a:lnSpc>
                 <a:spcPts val="2200"/>
@@ -15848,10 +16014,12 @@
             </a:r>
           </a:p>
           <a:p>
-            <a:pPr>
-              <a:spcAft>
-                <a:spcPts val="1000"/>
-              </a:spcAft>
+            <a:pPr lvl="0" marL="457200" indent="-228600">
+              <a:buFont typeface="Calibri"/>
+              <a:spcAft>
+                <a:spcPts val="1000"/>
+              </a:spcAft>
+              <a:buSzPct val="100000"/>
               <a:buChar char="•"/>
               <a:lnSpc>
                 <a:spcPts val="2200"/>
@@ -15987,10 +16155,12 @@
           </a:bodyPr>
           <a:lstStyle/>
           <a:p>
-            <a:pPr>
-              <a:spcAft>
-                <a:spcPts val="1000"/>
-              </a:spcAft>
+            <a:pPr lvl="0" marL="457200" indent="-228600">
+              <a:buFont typeface="Calibri"/>
+              <a:spcAft>
+                <a:spcPts val="1000"/>
+              </a:spcAft>
+              <a:buSzPct val="100000"/>
               <a:buChar char="•"/>
               <a:lnSpc>
                 <a:spcPts val="2200"/>
@@ -16007,10 +16177,12 @@
             </a:r>
           </a:p>
           <a:p>
-            <a:pPr>
-              <a:spcAft>
-                <a:spcPts val="1000"/>
-              </a:spcAft>
+            <a:pPr lvl="0" marL="457200" indent="-228600">
+              <a:buFont typeface="Calibri"/>
+              <a:spcAft>
+                <a:spcPts val="1000"/>
+              </a:spcAft>
+              <a:buSzPct val="100000"/>
               <a:buChar char="•"/>
               <a:lnSpc>
                 <a:spcPts val="2200"/>
@@ -16027,10 +16199,12 @@
             </a:r>
           </a:p>
           <a:p>
-            <a:pPr>
-              <a:spcAft>
-                <a:spcPts val="1000"/>
-              </a:spcAft>
+            <a:pPr lvl="0" marL="457200" indent="-228600">
+              <a:buFont typeface="Calibri"/>
+              <a:spcAft>
+                <a:spcPts val="1000"/>
+              </a:spcAft>
+              <a:buSzPct val="100000"/>
               <a:buChar char="•"/>
               <a:lnSpc>
                 <a:spcPts val="2200"/>
@@ -16047,10 +16221,12 @@
             </a:r>
           </a:p>
           <a:p>
-            <a:pPr>
-              <a:spcAft>
-                <a:spcPts val="1000"/>
-              </a:spcAft>
+            <a:pPr lvl="0" marL="457200" indent="-228600">
+              <a:buFont typeface="Calibri"/>
+              <a:spcAft>
+                <a:spcPts val="1000"/>
+              </a:spcAft>
+              <a:buSzPct val="100000"/>
               <a:buChar char="•"/>
               <a:lnSpc>
                 <a:spcPts val="2200"/>
@@ -16067,10 +16243,12 @@
             </a:r>
           </a:p>
           <a:p>
-            <a:pPr>
-              <a:spcAft>
-                <a:spcPts val="1000"/>
-              </a:spcAft>
+            <a:pPr lvl="0" marL="457200" indent="-228600">
+              <a:buFont typeface="Calibri"/>
+              <a:spcAft>
+                <a:spcPts val="1000"/>
+              </a:spcAft>
+              <a:buSzPct val="100000"/>
               <a:buChar char="•"/>
               <a:lnSpc>
                 <a:spcPts val="2200"/>
@@ -16206,10 +16384,12 @@
           </a:bodyPr>
           <a:lstStyle/>
           <a:p>
-            <a:pPr>
-              <a:spcAft>
-                <a:spcPts val="1000"/>
-              </a:spcAft>
+            <a:pPr lvl="0" marL="457200" indent="-228600">
+              <a:buFont typeface="Calibri"/>
+              <a:spcAft>
+                <a:spcPts val="1000"/>
+              </a:spcAft>
+              <a:buSzPct val="100000"/>
               <a:buChar char="•"/>
               <a:lnSpc>
                 <a:spcPts val="2200"/>
@@ -16226,10 +16406,12 @@
             </a:r>
           </a:p>
           <a:p>
-            <a:pPr>
-              <a:spcAft>
-                <a:spcPts val="1000"/>
-              </a:spcAft>
+            <a:pPr lvl="0" marL="457200" indent="-228600">
+              <a:buFont typeface="Calibri"/>
+              <a:spcAft>
+                <a:spcPts val="1000"/>
+              </a:spcAft>
+              <a:buSzPct val="100000"/>
               <a:buChar char="•"/>
               <a:lnSpc>
                 <a:spcPts val="2200"/>
@@ -16246,10 +16428,12 @@
             </a:r>
           </a:p>
           <a:p>
-            <a:pPr>
-              <a:spcAft>
-                <a:spcPts val="1000"/>
-              </a:spcAft>
+            <a:pPr lvl="0" marL="457200" indent="-228600">
+              <a:buFont typeface="Calibri"/>
+              <a:spcAft>
+                <a:spcPts val="1000"/>
+              </a:spcAft>
+              <a:buSzPct val="100000"/>
               <a:buChar char="•"/>
               <a:lnSpc>
                 <a:spcPts val="2200"/>
@@ -16385,10 +16569,12 @@
           </a:bodyPr>
           <a:lstStyle/>
           <a:p>
-            <a:pPr>
-              <a:spcAft>
-                <a:spcPts val="1000"/>
-              </a:spcAft>
+            <a:pPr lvl="0" marL="457200" indent="-228600">
+              <a:buFont typeface="Calibri"/>
+              <a:spcAft>
+                <a:spcPts val="1000"/>
+              </a:spcAft>
+              <a:buSzPct val="100000"/>
               <a:buChar char="•"/>
               <a:lnSpc>
                 <a:spcPts val="2200"/>
@@ -16405,10 +16591,12 @@
             </a:r>
           </a:p>
           <a:p>
-            <a:pPr>
-              <a:spcAft>
-                <a:spcPts val="1000"/>
-              </a:spcAft>
+            <a:pPr lvl="0" marL="457200" indent="-228600">
+              <a:buFont typeface="Calibri"/>
+              <a:spcAft>
+                <a:spcPts val="1000"/>
+              </a:spcAft>
+              <a:buSzPct val="100000"/>
               <a:buChar char="•"/>
               <a:lnSpc>
                 <a:spcPts val="2200"/>
@@ -16544,10 +16732,12 @@
           </a:bodyPr>
           <a:lstStyle/>
           <a:p>
-            <a:pPr>
-              <a:spcAft>
-                <a:spcPts val="1000"/>
-              </a:spcAft>
+            <a:pPr lvl="0" marL="457200" indent="-228600">
+              <a:buFont typeface="Calibri"/>
+              <a:spcAft>
+                <a:spcPts val="1000"/>
+              </a:spcAft>
+              <a:buSzPct val="100000"/>
               <a:buChar char="•"/>
               <a:lnSpc>
                 <a:spcPts val="2200"/>
@@ -16564,10 +16754,12 @@
             </a:r>
           </a:p>
           <a:p>
-            <a:pPr>
-              <a:spcAft>
-                <a:spcPts val="1000"/>
-              </a:spcAft>
+            <a:pPr lvl="0" marL="457200" indent="-228600">
+              <a:buFont typeface="Calibri"/>
+              <a:spcAft>
+                <a:spcPts val="1000"/>
+              </a:spcAft>
+              <a:buSzPct val="100000"/>
               <a:buChar char="•"/>
               <a:lnSpc>
                 <a:spcPts val="2200"/>
@@ -16584,10 +16776,12 @@
             </a:r>
           </a:p>
           <a:p>
-            <a:pPr>
-              <a:spcAft>
-                <a:spcPts val="1000"/>
-              </a:spcAft>
+            <a:pPr lvl="0" marL="457200" indent="-228600">
+              <a:buFont typeface="Calibri"/>
+              <a:spcAft>
+                <a:spcPts val="1000"/>
+              </a:spcAft>
+              <a:buSzPct val="100000"/>
               <a:buChar char="•"/>
               <a:lnSpc>
                 <a:spcPts val="2200"/>
@@ -16723,10 +16917,12 @@
           </a:bodyPr>
           <a:lstStyle/>
           <a:p>
-            <a:pPr>
-              <a:spcAft>
-                <a:spcPts val="1000"/>
-              </a:spcAft>
+            <a:pPr lvl="0" marL="457200" indent="-228600">
+              <a:buFont typeface="Calibri"/>
+              <a:spcAft>
+                <a:spcPts val="1000"/>
+              </a:spcAft>
+              <a:buSzPct val="100000"/>
               <a:buChar char="•"/>
               <a:lnSpc>
                 <a:spcPts val="2200"/>
@@ -16743,10 +16939,12 @@
             </a:r>
           </a:p>
           <a:p>
-            <a:pPr>
-              <a:spcAft>
-                <a:spcPts val="1000"/>
-              </a:spcAft>
+            <a:pPr lvl="0" marL="457200" indent="-228600">
+              <a:buFont typeface="Calibri"/>
+              <a:spcAft>
+                <a:spcPts val="1000"/>
+              </a:spcAft>
+              <a:buSzPct val="100000"/>
               <a:buChar char="•"/>
               <a:lnSpc>
                 <a:spcPts val="2200"/>
@@ -16882,10 +17080,12 @@
           </a:bodyPr>
           <a:lstStyle/>
           <a:p>
-            <a:pPr>
-              <a:spcAft>
-                <a:spcPts val="1000"/>
-              </a:spcAft>
+            <a:pPr lvl="0" marL="457200" indent="-228600">
+              <a:buFont typeface="Calibri"/>
+              <a:spcAft>
+                <a:spcPts val="1000"/>
+              </a:spcAft>
+              <a:buSzPct val="100000"/>
               <a:buChar char="•"/>
               <a:lnSpc>
                 <a:spcPts val="2200"/>
@@ -16902,10 +17102,12 @@
             </a:r>
           </a:p>
           <a:p>
-            <a:pPr>
-              <a:spcAft>
-                <a:spcPts val="1000"/>
-              </a:spcAft>
+            <a:pPr lvl="0" marL="457200" indent="-228600">
+              <a:buFont typeface="Calibri"/>
+              <a:spcAft>
+                <a:spcPts val="1000"/>
+              </a:spcAft>
+              <a:buSzPct val="100000"/>
               <a:buChar char="•"/>
               <a:lnSpc>
                 <a:spcPts val="2200"/>
@@ -16922,10 +17124,12 @@
             </a:r>
           </a:p>
           <a:p>
-            <a:pPr>
-              <a:spcAft>
-                <a:spcPts val="1000"/>
-              </a:spcAft>
+            <a:pPr lvl="0" marL="457200" indent="-228600">
+              <a:buFont typeface="Calibri"/>
+              <a:spcAft>
+                <a:spcPts val="1000"/>
+              </a:spcAft>
+              <a:buSzPct val="100000"/>
               <a:buChar char="•"/>
               <a:lnSpc>
                 <a:spcPts val="2200"/>
@@ -16942,10 +17146,12 @@
             </a:r>
           </a:p>
           <a:p>
-            <a:pPr>
-              <a:spcAft>
-                <a:spcPts val="1000"/>
-              </a:spcAft>
+            <a:pPr lvl="0" marL="457200" indent="-228600">
+              <a:buFont typeface="Calibri"/>
+              <a:spcAft>
+                <a:spcPts val="1000"/>
+              </a:spcAft>
+              <a:buSzPct val="100000"/>
               <a:buChar char="•"/>
               <a:lnSpc>
                 <a:spcPts val="2200"/>
@@ -17081,10 +17287,12 @@
           </a:bodyPr>
           <a:lstStyle/>
           <a:p>
-            <a:pPr>
-              <a:spcAft>
-                <a:spcPts val="1000"/>
-              </a:spcAft>
+            <a:pPr lvl="0" marL="457200" indent="-228600">
+              <a:buFont typeface="Calibri"/>
+              <a:spcAft>
+                <a:spcPts val="1000"/>
+              </a:spcAft>
+              <a:buSzPct val="100000"/>
               <a:buChar char="•"/>
               <a:lnSpc>
                 <a:spcPts val="2200"/>
@@ -17101,10 +17309,12 @@
             </a:r>
           </a:p>
           <a:p>
-            <a:pPr>
-              <a:spcAft>
-                <a:spcPts val="1000"/>
-              </a:spcAft>
+            <a:pPr lvl="0" marL="457200" indent="-228600">
+              <a:buFont typeface="Calibri"/>
+              <a:spcAft>
+                <a:spcPts val="1000"/>
+              </a:spcAft>
+              <a:buSzPct val="100000"/>
               <a:buChar char="•"/>
               <a:lnSpc>
                 <a:spcPts val="2200"/>
@@ -17121,10 +17331,12 @@
             </a:r>
           </a:p>
           <a:p>
-            <a:pPr>
-              <a:spcAft>
-                <a:spcPts val="1000"/>
-              </a:spcAft>
+            <a:pPr lvl="0" marL="457200" indent="-228600">
+              <a:buFont typeface="Calibri"/>
+              <a:spcAft>
+                <a:spcPts val="1000"/>
+              </a:spcAft>
+              <a:buSzPct val="100000"/>
               <a:buChar char="•"/>
               <a:lnSpc>
                 <a:spcPts val="2200"/>
@@ -17260,10 +17472,12 @@
           </a:bodyPr>
           <a:lstStyle/>
           <a:p>
-            <a:pPr>
-              <a:spcAft>
-                <a:spcPts val="1000"/>
-              </a:spcAft>
+            <a:pPr lvl="0" marL="457200" indent="-228600">
+              <a:buFont typeface="Calibri"/>
+              <a:spcAft>
+                <a:spcPts val="1000"/>
+              </a:spcAft>
+              <a:buSzPct val="100000"/>
               <a:buChar char="•"/>
               <a:lnSpc>
                 <a:spcPts val="2200"/>
@@ -17280,10 +17494,12 @@
             </a:r>
           </a:p>
           <a:p>
-            <a:pPr>
-              <a:spcAft>
-                <a:spcPts val="1000"/>
-              </a:spcAft>
+            <a:pPr lvl="0" marL="457200" indent="-228600">
+              <a:buFont typeface="Calibri"/>
+              <a:spcAft>
+                <a:spcPts val="1000"/>
+              </a:spcAft>
+              <a:buSzPct val="100000"/>
               <a:buChar char="•"/>
               <a:lnSpc>
                 <a:spcPts val="2200"/>
@@ -17300,10 +17516,12 @@
             </a:r>
           </a:p>
           <a:p>
-            <a:pPr>
-              <a:spcAft>
-                <a:spcPts val="1000"/>
-              </a:spcAft>
+            <a:pPr lvl="0" marL="457200" indent="-228600">
+              <a:buFont typeface="Calibri"/>
+              <a:spcAft>
+                <a:spcPts val="1000"/>
+              </a:spcAft>
+              <a:buSzPct val="100000"/>
               <a:buChar char="•"/>
               <a:lnSpc>
                 <a:spcPts val="2200"/>
@@ -17439,10 +17657,12 @@
           </a:bodyPr>
           <a:lstStyle/>
           <a:p>
-            <a:pPr>
-              <a:spcAft>
-                <a:spcPts val="1000"/>
-              </a:spcAft>
+            <a:pPr lvl="0" marL="457200" indent="-228600">
+              <a:buFont typeface="Calibri"/>
+              <a:spcAft>
+                <a:spcPts val="1000"/>
+              </a:spcAft>
+              <a:buSzPct val="100000"/>
               <a:buChar char="•"/>
               <a:lnSpc>
                 <a:spcPts val="2200"/>
@@ -17459,10 +17679,12 @@
             </a:r>
           </a:p>
           <a:p>
-            <a:pPr>
-              <a:spcAft>
-                <a:spcPts val="1000"/>
-              </a:spcAft>
+            <a:pPr lvl="0" marL="457200" indent="-228600">
+              <a:buFont typeface="Calibri"/>
+              <a:spcAft>
+                <a:spcPts val="1000"/>
+              </a:spcAft>
+              <a:buSzPct val="100000"/>
               <a:buChar char="•"/>
               <a:lnSpc>
                 <a:spcPts val="2200"/>
@@ -17479,10 +17701,12 @@
             </a:r>
           </a:p>
           <a:p>
-            <a:pPr>
-              <a:spcAft>
-                <a:spcPts val="1000"/>
-              </a:spcAft>
+            <a:pPr lvl="0" marL="457200" indent="-228600">
+              <a:buFont typeface="Calibri"/>
+              <a:spcAft>
+                <a:spcPts val="1000"/>
+              </a:spcAft>
+              <a:buSzPct val="100000"/>
               <a:buChar char="•"/>
               <a:lnSpc>
                 <a:spcPts val="2200"/>
@@ -17499,10 +17723,12 @@
             </a:r>
           </a:p>
           <a:p>
-            <a:pPr>
-              <a:spcAft>
-                <a:spcPts val="1000"/>
-              </a:spcAft>
+            <a:pPr lvl="0" marL="457200" indent="-228600">
+              <a:buFont typeface="Calibri"/>
+              <a:spcAft>
+                <a:spcPts val="1000"/>
+              </a:spcAft>
+              <a:buSzPct val="100000"/>
               <a:buChar char="•"/>
               <a:lnSpc>
                 <a:spcPts val="2200"/>
@@ -17638,10 +17864,12 @@
           </a:bodyPr>
           <a:lstStyle/>
           <a:p>
-            <a:pPr>
-              <a:spcAft>
-                <a:spcPts val="1000"/>
-              </a:spcAft>
+            <a:pPr lvl="0" marL="457200" indent="-228600">
+              <a:buFont typeface="Calibri"/>
+              <a:spcAft>
+                <a:spcPts val="1000"/>
+              </a:spcAft>
+              <a:buSzPct val="100000"/>
               <a:buChar char="•"/>
               <a:lnSpc>
                 <a:spcPts val="2200"/>
@@ -17658,10 +17886,12 @@
             </a:r>
           </a:p>
           <a:p>
-            <a:pPr>
-              <a:spcAft>
-                <a:spcPts val="1000"/>
-              </a:spcAft>
+            <a:pPr lvl="0" marL="457200" indent="-228600">
+              <a:buFont typeface="Calibri"/>
+              <a:spcAft>
+                <a:spcPts val="1000"/>
+              </a:spcAft>
+              <a:buSzPct val="100000"/>
               <a:buChar char="•"/>
               <a:lnSpc>
                 <a:spcPts val="2200"/>
@@ -17797,10 +18027,12 @@
           </a:bodyPr>
           <a:lstStyle/>
           <a:p>
-            <a:pPr>
-              <a:spcAft>
-                <a:spcPts val="1000"/>
-              </a:spcAft>
+            <a:pPr lvl="0" marL="457200" indent="-228600">
+              <a:buFont typeface="Calibri"/>
+              <a:spcAft>
+                <a:spcPts val="1000"/>
+              </a:spcAft>
+              <a:buSzPct val="100000"/>
               <a:buChar char="•"/>
               <a:lnSpc>
                 <a:spcPts val="2200"/>
@@ -17817,10 +18049,12 @@
             </a:r>
           </a:p>
           <a:p>
-            <a:pPr>
-              <a:spcAft>
-                <a:spcPts val="1000"/>
-              </a:spcAft>
+            <a:pPr lvl="0" marL="457200" indent="-228600">
+              <a:buFont typeface="Calibri"/>
+              <a:spcAft>
+                <a:spcPts val="1000"/>
+              </a:spcAft>
+              <a:buSzPct val="100000"/>
               <a:buChar char="•"/>
               <a:lnSpc>
                 <a:spcPts val="2200"/>
@@ -17837,10 +18071,12 @@
             </a:r>
           </a:p>
           <a:p>
-            <a:pPr>
-              <a:spcAft>
-                <a:spcPts val="1000"/>
-              </a:spcAft>
+            <a:pPr lvl="0" marL="457200" indent="-228600">
+              <a:buFont typeface="Calibri"/>
+              <a:spcAft>
+                <a:spcPts val="1000"/>
+              </a:spcAft>
+              <a:buSzPct val="100000"/>
               <a:buChar char="•"/>
               <a:lnSpc>
                 <a:spcPts val="2200"/>
@@ -17857,10 +18093,12 @@
             </a:r>
           </a:p>
           <a:p>
-            <a:pPr>
-              <a:spcAft>
-                <a:spcPts val="1000"/>
-              </a:spcAft>
+            <a:pPr lvl="0" marL="457200" indent="-228600">
+              <a:buFont typeface="Calibri"/>
+              <a:spcAft>
+                <a:spcPts val="1000"/>
+              </a:spcAft>
+              <a:buSzPct val="100000"/>
               <a:buChar char="•"/>
               <a:lnSpc>
                 <a:spcPts val="2200"/>
@@ -17996,10 +18234,12 @@
           </a:bodyPr>
           <a:lstStyle/>
           <a:p>
-            <a:pPr>
-              <a:spcAft>
-                <a:spcPts val="1000"/>
-              </a:spcAft>
+            <a:pPr lvl="0" marL="457200" indent="-228600">
+              <a:buFont typeface="Calibri"/>
+              <a:spcAft>
+                <a:spcPts val="1000"/>
+              </a:spcAft>
+              <a:buSzPct val="100000"/>
               <a:buChar char="•"/>
               <a:lnSpc>
                 <a:spcPts val="2200"/>
@@ -18016,10 +18256,12 @@
             </a:r>
           </a:p>
           <a:p>
-            <a:pPr>
-              <a:spcAft>
-                <a:spcPts val="1000"/>
-              </a:spcAft>
+            <a:pPr lvl="0" marL="457200" indent="-228600">
+              <a:buFont typeface="Calibri"/>
+              <a:spcAft>
+                <a:spcPts val="1000"/>
+              </a:spcAft>
+              <a:buSzPct val="100000"/>
               <a:buChar char="•"/>
               <a:lnSpc>
                 <a:spcPts val="2200"/>
@@ -18036,10 +18278,12 @@
             </a:r>
           </a:p>
           <a:p>
-            <a:pPr>
-              <a:spcAft>
-                <a:spcPts val="1000"/>
-              </a:spcAft>
+            <a:pPr lvl="0" marL="457200" indent="-228600">
+              <a:buFont typeface="Calibri"/>
+              <a:spcAft>
+                <a:spcPts val="1000"/>
+              </a:spcAft>
+              <a:buSzPct val="100000"/>
               <a:buChar char="•"/>
               <a:lnSpc>
                 <a:spcPts val="2200"/>
@@ -18056,10 +18300,12 @@
             </a:r>
           </a:p>
           <a:p>
-            <a:pPr>
-              <a:spcAft>
-                <a:spcPts val="1000"/>
-              </a:spcAft>
+            <a:pPr lvl="0" marL="457200" indent="-228600">
+              <a:buFont typeface="Calibri"/>
+              <a:spcAft>
+                <a:spcPts val="1000"/>
+              </a:spcAft>
+              <a:buSzPct val="100000"/>
               <a:buChar char="•"/>
               <a:lnSpc>
                 <a:spcPts val="2200"/>
@@ -18195,10 +18441,12 @@
           </a:bodyPr>
           <a:lstStyle/>
           <a:p>
-            <a:pPr>
-              <a:spcAft>
-                <a:spcPts val="1000"/>
-              </a:spcAft>
+            <a:pPr lvl="0" marL="457200" indent="-228600">
+              <a:buFont typeface="Calibri"/>
+              <a:spcAft>
+                <a:spcPts val="1000"/>
+              </a:spcAft>
+              <a:buSzPct val="100000"/>
               <a:buChar char="•"/>
               <a:lnSpc>
                 <a:spcPts val="2200"/>
@@ -18215,10 +18463,12 @@
             </a:r>
           </a:p>
           <a:p>
-            <a:pPr>
-              <a:spcAft>
-                <a:spcPts val="1000"/>
-              </a:spcAft>
+            <a:pPr lvl="0" marL="457200" indent="-228600">
+              <a:buFont typeface="Calibri"/>
+              <a:spcAft>
+                <a:spcPts val="1000"/>
+              </a:spcAft>
+              <a:buSzPct val="100000"/>
               <a:buChar char="•"/>
               <a:lnSpc>
                 <a:spcPts val="2200"/>
@@ -18235,10 +18485,12 @@
             </a:r>
           </a:p>
           <a:p>
-            <a:pPr>
-              <a:spcAft>
-                <a:spcPts val="1000"/>
-              </a:spcAft>
+            <a:pPr lvl="0" marL="457200" indent="-228600">
+              <a:buFont typeface="Calibri"/>
+              <a:spcAft>
+                <a:spcPts val="1000"/>
+              </a:spcAft>
+              <a:buSzPct val="100000"/>
               <a:buChar char="•"/>
               <a:lnSpc>
                 <a:spcPts val="2200"/>
@@ -18374,10 +18626,12 @@
           </a:bodyPr>
           <a:lstStyle/>
           <a:p>
-            <a:pPr>
-              <a:spcAft>
-                <a:spcPts val="1000"/>
-              </a:spcAft>
+            <a:pPr lvl="0" marL="457200" indent="-228600">
+              <a:buFont typeface="Calibri"/>
+              <a:spcAft>
+                <a:spcPts val="1000"/>
+              </a:spcAft>
+              <a:buSzPct val="100000"/>
               <a:buChar char="•"/>
               <a:lnSpc>
                 <a:spcPts val="2200"/>
@@ -18394,10 +18648,12 @@
             </a:r>
           </a:p>
           <a:p>
-            <a:pPr>
-              <a:spcAft>
-                <a:spcPts val="1000"/>
-              </a:spcAft>
+            <a:pPr lvl="0" marL="457200" indent="-228600">
+              <a:buFont typeface="Calibri"/>
+              <a:spcAft>
+                <a:spcPts val="1000"/>
+              </a:spcAft>
+              <a:buSzPct val="100000"/>
               <a:buChar char="•"/>
               <a:lnSpc>
                 <a:spcPts val="2200"/>
@@ -18533,10 +18789,12 @@
           </a:bodyPr>
           <a:lstStyle/>
           <a:p>
-            <a:pPr>
-              <a:spcAft>
-                <a:spcPts val="1000"/>
-              </a:spcAft>
+            <a:pPr lvl="0" marL="457200" indent="-228600">
+              <a:buFont typeface="Calibri"/>
+              <a:spcAft>
+                <a:spcPts val="1000"/>
+              </a:spcAft>
+              <a:buSzPct val="100000"/>
               <a:buChar char="•"/>
               <a:lnSpc>
                 <a:spcPts val="2200"/>
@@ -18553,10 +18811,12 @@
             </a:r>
           </a:p>
           <a:p>
-            <a:pPr>
-              <a:spcAft>
-                <a:spcPts val="1000"/>
-              </a:spcAft>
+            <a:pPr lvl="0" marL="457200" indent="-228600">
+              <a:buFont typeface="Calibri"/>
+              <a:spcAft>
+                <a:spcPts val="1000"/>
+              </a:spcAft>
+              <a:buSzPct val="100000"/>
               <a:buChar char="•"/>
               <a:lnSpc>
                 <a:spcPts val="2200"/>
@@ -18573,10 +18833,12 @@
             </a:r>
           </a:p>
           <a:p>
-            <a:pPr>
-              <a:spcAft>
-                <a:spcPts val="1000"/>
-              </a:spcAft>
+            <a:pPr lvl="0" marL="457200" indent="-228600">
+              <a:buFont typeface="Calibri"/>
+              <a:spcAft>
+                <a:spcPts val="1000"/>
+              </a:spcAft>
+              <a:buSzPct val="100000"/>
               <a:buChar char="•"/>
               <a:lnSpc>
                 <a:spcPts val="2200"/>
@@ -18712,10 +18974,12 @@
           </a:bodyPr>
           <a:lstStyle/>
           <a:p>
-            <a:pPr>
-              <a:spcAft>
-                <a:spcPts val="1000"/>
-              </a:spcAft>
+            <a:pPr lvl="0" marL="457200" indent="-228600">
+              <a:buFont typeface="Calibri"/>
+              <a:spcAft>
+                <a:spcPts val="1000"/>
+              </a:spcAft>
+              <a:buSzPct val="100000"/>
               <a:buChar char="•"/>
               <a:lnSpc>
                 <a:spcPts val="2200"/>
@@ -18732,10 +18996,12 @@
             </a:r>
           </a:p>
           <a:p>
-            <a:pPr>
-              <a:spcAft>
-                <a:spcPts val="1000"/>
-              </a:spcAft>
+            <a:pPr lvl="0" marL="457200" indent="-228600">
+              <a:buFont typeface="Calibri"/>
+              <a:spcAft>
+                <a:spcPts val="1000"/>
+              </a:spcAft>
+              <a:buSzPct val="100000"/>
               <a:buChar char="•"/>
               <a:lnSpc>
                 <a:spcPts val="2200"/>
@@ -18871,10 +19137,12 @@
           </a:bodyPr>
           <a:lstStyle/>
           <a:p>
-            <a:pPr>
-              <a:spcAft>
-                <a:spcPts val="1000"/>
-              </a:spcAft>
+            <a:pPr lvl="0" marL="457200" indent="-228600">
+              <a:buFont typeface="Calibri"/>
+              <a:spcAft>
+                <a:spcPts val="1000"/>
+              </a:spcAft>
+              <a:buSzPct val="100000"/>
               <a:buChar char="•"/>
               <a:lnSpc>
                 <a:spcPts val="2200"/>
@@ -18891,10 +19159,12 @@
             </a:r>
           </a:p>
           <a:p>
-            <a:pPr>
-              <a:spcAft>
-                <a:spcPts val="1000"/>
-              </a:spcAft>
+            <a:pPr lvl="0" marL="457200" indent="-228600">
+              <a:buFont typeface="Calibri"/>
+              <a:spcAft>
+                <a:spcPts val="1000"/>
+              </a:spcAft>
+              <a:buSzPct val="100000"/>
               <a:buChar char="•"/>
               <a:lnSpc>
                 <a:spcPts val="2200"/>
@@ -18911,10 +19181,12 @@
             </a:r>
           </a:p>
           <a:p>
-            <a:pPr>
-              <a:spcAft>
-                <a:spcPts val="1000"/>
-              </a:spcAft>
+            <a:pPr lvl="0" marL="457200" indent="-228600">
+              <a:buFont typeface="Calibri"/>
+              <a:spcAft>
+                <a:spcPts val="1000"/>
+              </a:spcAft>
+              <a:buSzPct val="100000"/>
               <a:buChar char="•"/>
               <a:lnSpc>
                 <a:spcPts val="2200"/>
@@ -18931,10 +19203,12 @@
             </a:r>
           </a:p>
           <a:p>
-            <a:pPr>
-              <a:spcAft>
-                <a:spcPts val="1000"/>
-              </a:spcAft>
+            <a:pPr lvl="0" marL="457200" indent="-228600">
+              <a:buFont typeface="Calibri"/>
+              <a:spcAft>
+                <a:spcPts val="1000"/>
+              </a:spcAft>
+              <a:buSzPct val="100000"/>
               <a:buChar char="•"/>
               <a:lnSpc>
                 <a:spcPts val="2200"/>
@@ -19070,10 +19344,12 @@
           </a:bodyPr>
           <a:lstStyle/>
           <a:p>
-            <a:pPr>
-              <a:spcAft>
-                <a:spcPts val="1000"/>
-              </a:spcAft>
+            <a:pPr lvl="0" marL="457200" indent="-228600">
+              <a:buFont typeface="Calibri"/>
+              <a:spcAft>
+                <a:spcPts val="1000"/>
+              </a:spcAft>
+              <a:buSzPct val="100000"/>
               <a:buChar char="•"/>
               <a:lnSpc>
                 <a:spcPts val="2200"/>
@@ -19090,10 +19366,12 @@
             </a:r>
           </a:p>
           <a:p>
-            <a:pPr>
-              <a:spcAft>
-                <a:spcPts val="1000"/>
-              </a:spcAft>
+            <a:pPr lvl="0" marL="457200" indent="-228600">
+              <a:buFont typeface="Calibri"/>
+              <a:spcAft>
+                <a:spcPts val="1000"/>
+              </a:spcAft>
+              <a:buSzPct val="100000"/>
               <a:buChar char="•"/>
               <a:lnSpc>
                 <a:spcPts val="2200"/>
@@ -19110,10 +19388,12 @@
             </a:r>
           </a:p>
           <a:p>
-            <a:pPr>
-              <a:spcAft>
-                <a:spcPts val="1000"/>
-              </a:spcAft>
+            <a:pPr lvl="0" marL="457200" indent="-228600">
+              <a:buFont typeface="Calibri"/>
+              <a:spcAft>
+                <a:spcPts val="1000"/>
+              </a:spcAft>
+              <a:buSzPct val="100000"/>
               <a:buChar char="•"/>
               <a:lnSpc>
                 <a:spcPts val="2200"/>
@@ -19249,10 +19529,12 @@
           </a:bodyPr>
           <a:lstStyle/>
           <a:p>
-            <a:pPr>
-              <a:spcAft>
-                <a:spcPts val="1000"/>
-              </a:spcAft>
+            <a:pPr lvl="0" marL="457200" indent="-228600">
+              <a:buFont typeface="Calibri"/>
+              <a:spcAft>
+                <a:spcPts val="1000"/>
+              </a:spcAft>
+              <a:buSzPct val="100000"/>
               <a:buChar char="•"/>
               <a:lnSpc>
                 <a:spcPts val="2200"/>
@@ -19269,10 +19551,12 @@
             </a:r>
           </a:p>
           <a:p>
-            <a:pPr>
-              <a:spcAft>
-                <a:spcPts val="1000"/>
-              </a:spcAft>
+            <a:pPr lvl="0" marL="457200" indent="-228600">
+              <a:buFont typeface="Calibri"/>
+              <a:spcAft>
+                <a:spcPts val="1000"/>
+              </a:spcAft>
+              <a:buSzPct val="100000"/>
               <a:buChar char="•"/>
               <a:lnSpc>
                 <a:spcPts val="2200"/>
@@ -19289,10 +19573,12 @@
             </a:r>
           </a:p>
           <a:p>
-            <a:pPr>
-              <a:spcAft>
-                <a:spcPts val="1000"/>
-              </a:spcAft>
+            <a:pPr lvl="0" marL="457200" indent="-228600">
+              <a:buFont typeface="Calibri"/>
+              <a:spcAft>
+                <a:spcPts val="1000"/>
+              </a:spcAft>
+              <a:buSzPct val="100000"/>
               <a:buChar char="•"/>
               <a:lnSpc>
                 <a:spcPts val="2200"/>
@@ -19309,10 +19595,12 @@
             </a:r>
           </a:p>
           <a:p>
-            <a:pPr>
-              <a:spcAft>
-                <a:spcPts val="1000"/>
-              </a:spcAft>
+            <a:pPr lvl="0" marL="457200" indent="-228600">
+              <a:buFont typeface="Calibri"/>
+              <a:spcAft>
+                <a:spcPts val="1000"/>
+              </a:spcAft>
+              <a:buSzPct val="100000"/>
               <a:buChar char="•"/>
               <a:lnSpc>
                 <a:spcPts val="2200"/>
@@ -19448,10 +19736,12 @@
           </a:bodyPr>
           <a:lstStyle/>
           <a:p>
-            <a:pPr>
-              <a:spcAft>
-                <a:spcPts val="1000"/>
-              </a:spcAft>
+            <a:pPr lvl="0" marL="457200" indent="-228600">
+              <a:buFont typeface="Calibri"/>
+              <a:spcAft>
+                <a:spcPts val="1000"/>
+              </a:spcAft>
+              <a:buSzPct val="100000"/>
               <a:buChar char="•"/>
               <a:lnSpc>
                 <a:spcPts val="2200"/>
@@ -19468,10 +19758,12 @@
             </a:r>
           </a:p>
           <a:p>
-            <a:pPr>
-              <a:spcAft>
-                <a:spcPts val="1000"/>
-              </a:spcAft>
+            <a:pPr lvl="0" marL="457200" indent="-228600">
+              <a:buFont typeface="Calibri"/>
+              <a:spcAft>
+                <a:spcPts val="1000"/>
+              </a:spcAft>
+              <a:buSzPct val="100000"/>
               <a:buChar char="•"/>
               <a:lnSpc>
                 <a:spcPts val="2200"/>
@@ -19488,10 +19780,12 @@
             </a:r>
           </a:p>
           <a:p>
-            <a:pPr>
-              <a:spcAft>
-                <a:spcPts val="1000"/>
-              </a:spcAft>
+            <a:pPr lvl="0" marL="457200" indent="-228600">
+              <a:buFont typeface="Calibri"/>
+              <a:spcAft>
+                <a:spcPts val="1000"/>
+              </a:spcAft>
+              <a:buSzPct val="100000"/>
               <a:buChar char="•"/>
               <a:lnSpc>
                 <a:spcPts val="2200"/>
@@ -19627,10 +19921,12 @@
           </a:bodyPr>
           <a:lstStyle/>
           <a:p>
-            <a:pPr>
-              <a:spcAft>
-                <a:spcPts val="1000"/>
-              </a:spcAft>
+            <a:pPr lvl="0" marL="457200" indent="-228600">
+              <a:buFont typeface="Calibri"/>
+              <a:spcAft>
+                <a:spcPts val="1000"/>
+              </a:spcAft>
+              <a:buSzPct val="100000"/>
               <a:buChar char="•"/>
               <a:lnSpc>
                 <a:spcPts val="2200"/>
@@ -19647,10 +19943,12 @@
             </a:r>
           </a:p>
           <a:p>
-            <a:pPr>
-              <a:spcAft>
-                <a:spcPts val="1000"/>
-              </a:spcAft>
+            <a:pPr lvl="0" marL="457200" indent="-228600">
+              <a:buFont typeface="Calibri"/>
+              <a:spcAft>
+                <a:spcPts val="1000"/>
+              </a:spcAft>
+              <a:buSzPct val="100000"/>
               <a:buChar char="•"/>
               <a:lnSpc>
                 <a:spcPts val="2200"/>
@@ -19667,10 +19965,12 @@
             </a:r>
           </a:p>
           <a:p>
-            <a:pPr>
-              <a:spcAft>
-                <a:spcPts val="1000"/>
-              </a:spcAft>
+            <a:pPr lvl="0" marL="457200" indent="-228600">
+              <a:buFont typeface="Calibri"/>
+              <a:spcAft>
+                <a:spcPts val="1000"/>
+              </a:spcAft>
+              <a:buSzPct val="100000"/>
               <a:buChar char="•"/>
               <a:lnSpc>
                 <a:spcPts val="2200"/>
@@ -19806,10 +20106,12 @@
           </a:bodyPr>
           <a:lstStyle/>
           <a:p>
-            <a:pPr>
-              <a:spcAft>
-                <a:spcPts val="1000"/>
-              </a:spcAft>
+            <a:pPr lvl="0" marL="457200" indent="-228600">
+              <a:buFont typeface="Calibri"/>
+              <a:spcAft>
+                <a:spcPts val="1000"/>
+              </a:spcAft>
+              <a:buSzPct val="100000"/>
               <a:buChar char="•"/>
               <a:lnSpc>
                 <a:spcPts val="2200"/>
@@ -19826,10 +20128,12 @@
             </a:r>
           </a:p>
           <a:p>
-            <a:pPr>
-              <a:spcAft>
-                <a:spcPts val="1000"/>
-              </a:spcAft>
+            <a:pPr lvl="0" marL="457200" indent="-228600">
+              <a:buFont typeface="Calibri"/>
+              <a:spcAft>
+                <a:spcPts val="1000"/>
+              </a:spcAft>
+              <a:buSzPct val="100000"/>
               <a:buChar char="•"/>
               <a:lnSpc>
                 <a:spcPts val="2200"/>
@@ -19846,10 +20150,12 @@
             </a:r>
           </a:p>
           <a:p>
-            <a:pPr>
-              <a:spcAft>
-                <a:spcPts val="1000"/>
-              </a:spcAft>
+            <a:pPr lvl="0" marL="457200" indent="-228600">
+              <a:buFont typeface="Calibri"/>
+              <a:spcAft>
+                <a:spcPts val="1000"/>
+              </a:spcAft>
+              <a:buSzPct val="100000"/>
               <a:buChar char="•"/>
               <a:lnSpc>
                 <a:spcPts val="2200"/>
@@ -19866,10 +20172,12 @@
             </a:r>
           </a:p>
           <a:p>
-            <a:pPr>
-              <a:spcAft>
-                <a:spcPts val="1000"/>
-              </a:spcAft>
+            <a:pPr lvl="0" marL="457200" indent="-228600">
+              <a:buFont typeface="Calibri"/>
+              <a:spcAft>
+                <a:spcPts val="1000"/>
+              </a:spcAft>
+              <a:buSzPct val="100000"/>
               <a:buChar char="•"/>
               <a:lnSpc>
                 <a:spcPts val="2200"/>
@@ -20005,10 +20313,12 @@
           </a:bodyPr>
           <a:lstStyle/>
           <a:p>
-            <a:pPr>
-              <a:spcAft>
-                <a:spcPts val="1000"/>
-              </a:spcAft>
+            <a:pPr lvl="0" marL="457200" indent="-228600">
+              <a:buFont typeface="Calibri"/>
+              <a:spcAft>
+                <a:spcPts val="1000"/>
+              </a:spcAft>
+              <a:buSzPct val="100000"/>
               <a:buChar char="•"/>
               <a:lnSpc>
                 <a:spcPts val="2200"/>
@@ -20025,10 +20335,12 @@
             </a:r>
           </a:p>
           <a:p>
-            <a:pPr>
-              <a:spcAft>
-                <a:spcPts val="1000"/>
-              </a:spcAft>
+            <a:pPr lvl="0" marL="457200" indent="-228600">
+              <a:buFont typeface="Calibri"/>
+              <a:spcAft>
+                <a:spcPts val="1000"/>
+              </a:spcAft>
+              <a:buSzPct val="100000"/>
               <a:buChar char="•"/>
               <a:lnSpc>
                 <a:spcPts val="2200"/>
@@ -20164,10 +20476,12 @@
           </a:bodyPr>
           <a:lstStyle/>
           <a:p>
-            <a:pPr>
-              <a:spcAft>
-                <a:spcPts val="1000"/>
-              </a:spcAft>
+            <a:pPr lvl="0" marL="457200" indent="-228600">
+              <a:buFont typeface="Calibri"/>
+              <a:spcAft>
+                <a:spcPts val="1000"/>
+              </a:spcAft>
+              <a:buSzPct val="100000"/>
               <a:buChar char="•"/>
               <a:lnSpc>
                 <a:spcPts val="2200"/>
@@ -20184,10 +20498,12 @@
             </a:r>
           </a:p>
           <a:p>
-            <a:pPr>
-              <a:spcAft>
-                <a:spcPts val="1000"/>
-              </a:spcAft>
+            <a:pPr lvl="0" marL="457200" indent="-228600">
+              <a:buFont typeface="Calibri"/>
+              <a:spcAft>
+                <a:spcPts val="1000"/>
+              </a:spcAft>
+              <a:buSzPct val="100000"/>
               <a:buChar char="•"/>
               <a:lnSpc>
                 <a:spcPts val="2200"/>
@@ -20204,10 +20520,12 @@
             </a:r>
           </a:p>
           <a:p>
-            <a:pPr>
-              <a:spcAft>
-                <a:spcPts val="1000"/>
-              </a:spcAft>
+            <a:pPr lvl="0" marL="457200" indent="-228600">
+              <a:buFont typeface="Calibri"/>
+              <a:spcAft>
+                <a:spcPts val="1000"/>
+              </a:spcAft>
+              <a:buSzPct val="100000"/>
               <a:buChar char="•"/>
               <a:lnSpc>
                 <a:spcPts val="2200"/>
@@ -20224,10 +20542,12 @@
             </a:r>
           </a:p>
           <a:p>
-            <a:pPr>
-              <a:spcAft>
-                <a:spcPts val="1000"/>
-              </a:spcAft>
+            <a:pPr lvl="0" marL="457200" indent="-228600">
+              <a:buFont typeface="Calibri"/>
+              <a:spcAft>
+                <a:spcPts val="1000"/>
+              </a:spcAft>
+              <a:buSzPct val="100000"/>
               <a:buChar char="•"/>
               <a:lnSpc>
                 <a:spcPts val="2200"/>
@@ -20363,10 +20683,12 @@
           </a:bodyPr>
           <a:lstStyle/>
           <a:p>
-            <a:pPr>
-              <a:spcAft>
-                <a:spcPts val="1000"/>
-              </a:spcAft>
+            <a:pPr lvl="0" marL="457200" indent="-228600">
+              <a:buFont typeface="Calibri"/>
+              <a:spcAft>
+                <a:spcPts val="1000"/>
+              </a:spcAft>
+              <a:buSzPct val="100000"/>
               <a:buChar char="•"/>
               <a:lnSpc>
                 <a:spcPts val="2200"/>
@@ -20383,10 +20705,12 @@
             </a:r>
           </a:p>
           <a:p>
-            <a:pPr>
-              <a:spcAft>
-                <a:spcPts val="1000"/>
-              </a:spcAft>
+            <a:pPr lvl="0" marL="457200" indent="-228600">
+              <a:buFont typeface="Calibri"/>
+              <a:spcAft>
+                <a:spcPts val="1000"/>
+              </a:spcAft>
+              <a:buSzPct val="100000"/>
               <a:buChar char="•"/>
               <a:lnSpc>
                 <a:spcPts val="2200"/>
@@ -20403,10 +20727,12 @@
             </a:r>
           </a:p>
           <a:p>
-            <a:pPr>
-              <a:spcAft>
-                <a:spcPts val="1000"/>
-              </a:spcAft>
+            <a:pPr lvl="0" marL="457200" indent="-228600">
+              <a:buFont typeface="Calibri"/>
+              <a:spcAft>
+                <a:spcPts val="1000"/>
+              </a:spcAft>
+              <a:buSzPct val="100000"/>
               <a:buChar char="•"/>
               <a:lnSpc>
                 <a:spcPts val="2200"/>
@@ -20542,10 +20868,12 @@
           </a:bodyPr>
           <a:lstStyle/>
           <a:p>
-            <a:pPr>
-              <a:spcAft>
-                <a:spcPts val="1000"/>
-              </a:spcAft>
+            <a:pPr lvl="0" marL="457200" indent="-228600">
+              <a:buFont typeface="Calibri"/>
+              <a:spcAft>
+                <a:spcPts val="1000"/>
+              </a:spcAft>
+              <a:buSzPct val="100000"/>
               <a:buChar char="•"/>
               <a:lnSpc>
                 <a:spcPts val="2200"/>
@@ -20562,10 +20890,12 @@
             </a:r>
           </a:p>
           <a:p>
-            <a:pPr>
-              <a:spcAft>
-                <a:spcPts val="1000"/>
-              </a:spcAft>
+            <a:pPr lvl="0" marL="457200" indent="-228600">
+              <a:buFont typeface="Calibri"/>
+              <a:spcAft>
+                <a:spcPts val="1000"/>
+              </a:spcAft>
+              <a:buSzPct val="100000"/>
               <a:buChar char="•"/>
               <a:lnSpc>
                 <a:spcPts val="2200"/>
@@ -20582,10 +20912,12 @@
             </a:r>
           </a:p>
           <a:p>
-            <a:pPr>
-              <a:spcAft>
-                <a:spcPts val="1000"/>
-              </a:spcAft>
+            <a:pPr lvl="0" marL="457200" indent="-228600">
+              <a:buFont typeface="Calibri"/>
+              <a:spcAft>
+                <a:spcPts val="1000"/>
+              </a:spcAft>
+              <a:buSzPct val="100000"/>
               <a:buChar char="•"/>
               <a:lnSpc>
                 <a:spcPts val="2200"/>
@@ -20721,10 +21053,12 @@
           </a:bodyPr>
           <a:lstStyle/>
           <a:p>
-            <a:pPr>
-              <a:spcAft>
-                <a:spcPts val="1000"/>
-              </a:spcAft>
+            <a:pPr lvl="0" marL="457200" indent="-228600">
+              <a:buFont typeface="Calibri"/>
+              <a:spcAft>
+                <a:spcPts val="1000"/>
+              </a:spcAft>
+              <a:buSzPct val="100000"/>
               <a:buChar char="•"/>
               <a:lnSpc>
                 <a:spcPts val="2200"/>
@@ -20741,10 +21075,12 @@
             </a:r>
           </a:p>
           <a:p>
-            <a:pPr>
-              <a:spcAft>
-                <a:spcPts val="1000"/>
-              </a:spcAft>
+            <a:pPr lvl="0" marL="457200" indent="-228600">
+              <a:buFont typeface="Calibri"/>
+              <a:spcAft>
+                <a:spcPts val="1000"/>
+              </a:spcAft>
+              <a:buSzPct val="100000"/>
               <a:buChar char="•"/>
               <a:lnSpc>
                 <a:spcPts val="2200"/>
@@ -20880,10 +21216,12 @@
           </a:bodyPr>
           <a:lstStyle/>
           <a:p>
-            <a:pPr>
-              <a:spcAft>
-                <a:spcPts val="1000"/>
-              </a:spcAft>
+            <a:pPr lvl="0" marL="457200" indent="-228600">
+              <a:buFont typeface="Calibri"/>
+              <a:spcAft>
+                <a:spcPts val="1000"/>
+              </a:spcAft>
+              <a:buSzPct val="100000"/>
               <a:buChar char="•"/>
               <a:lnSpc>
                 <a:spcPts val="2200"/>
@@ -20900,10 +21238,12 @@
             </a:r>
           </a:p>
           <a:p>
-            <a:pPr>
-              <a:spcAft>
-                <a:spcPts val="1000"/>
-              </a:spcAft>
+            <a:pPr lvl="0" marL="457200" indent="-228600">
+              <a:buFont typeface="Calibri"/>
+              <a:spcAft>
+                <a:spcPts val="1000"/>
+              </a:spcAft>
+              <a:buSzPct val="100000"/>
               <a:buChar char="•"/>
               <a:lnSpc>
                 <a:spcPts val="2200"/>
@@ -21039,10 +21379,12 @@
           </a:bodyPr>
           <a:lstStyle/>
           <a:p>
-            <a:pPr>
-              <a:spcAft>
-                <a:spcPts val="1000"/>
-              </a:spcAft>
+            <a:pPr lvl="0" marL="457200" indent="-228600">
+              <a:buFont typeface="Calibri"/>
+              <a:spcAft>
+                <a:spcPts val="1000"/>
+              </a:spcAft>
+              <a:buSzPct val="100000"/>
               <a:buChar char="•"/>
               <a:lnSpc>
                 <a:spcPts val="2200"/>
@@ -21059,10 +21401,12 @@
             </a:r>
           </a:p>
           <a:p>
-            <a:pPr>
-              <a:spcAft>
-                <a:spcPts val="1000"/>
-              </a:spcAft>
+            <a:pPr lvl="0" marL="457200" indent="-228600">
+              <a:buFont typeface="Calibri"/>
+              <a:spcAft>
+                <a:spcPts val="1000"/>
+              </a:spcAft>
+              <a:buSzPct val="100000"/>
               <a:buChar char="•"/>
               <a:lnSpc>
                 <a:spcPts val="2200"/>
@@ -21079,10 +21423,12 @@
             </a:r>
           </a:p>
           <a:p>
-            <a:pPr>
-              <a:spcAft>
-                <a:spcPts val="1000"/>
-              </a:spcAft>
+            <a:pPr lvl="0" marL="457200" indent="-228600">
+              <a:buFont typeface="Calibri"/>
+              <a:spcAft>
+                <a:spcPts val="1000"/>
+              </a:spcAft>
+              <a:buSzPct val="100000"/>
               <a:buChar char="•"/>
               <a:lnSpc>
                 <a:spcPts val="2200"/>
@@ -21218,10 +21564,12 @@
           </a:bodyPr>
           <a:lstStyle/>
           <a:p>
-            <a:pPr>
-              <a:spcAft>
-                <a:spcPts val="1000"/>
-              </a:spcAft>
+            <a:pPr lvl="0" marL="457200" indent="-228600">
+              <a:buFont typeface="Calibri"/>
+              <a:spcAft>
+                <a:spcPts val="1000"/>
+              </a:spcAft>
+              <a:buSzPct val="100000"/>
               <a:buChar char="•"/>
               <a:lnSpc>
                 <a:spcPts val="2200"/>
@@ -21238,10 +21586,12 @@
             </a:r>
           </a:p>
           <a:p>
-            <a:pPr>
-              <a:spcAft>
-                <a:spcPts val="1000"/>
-              </a:spcAft>
+            <a:pPr lvl="0" marL="457200" indent="-228600">
+              <a:buFont typeface="Calibri"/>
+              <a:spcAft>
+                <a:spcPts val="1000"/>
+              </a:spcAft>
+              <a:buSzPct val="100000"/>
               <a:buChar char="•"/>
               <a:lnSpc>
                 <a:spcPts val="2200"/>
@@ -21258,10 +21608,12 @@
             </a:r>
           </a:p>
           <a:p>
-            <a:pPr>
-              <a:spcAft>
-                <a:spcPts val="1000"/>
-              </a:spcAft>
+            <a:pPr lvl="0" marL="457200" indent="-228600">
+              <a:buFont typeface="Calibri"/>
+              <a:spcAft>
+                <a:spcPts val="1000"/>
+              </a:spcAft>
+              <a:buSzPct val="100000"/>
               <a:buChar char="•"/>
               <a:lnSpc>
                 <a:spcPts val="2200"/>
@@ -21278,10 +21630,12 @@
             </a:r>
           </a:p>
           <a:p>
-            <a:pPr>
-              <a:spcAft>
-                <a:spcPts val="1000"/>
-              </a:spcAft>
+            <a:pPr lvl="0" marL="457200" indent="-228600">
+              <a:buFont typeface="Calibri"/>
+              <a:spcAft>
+                <a:spcPts val="1000"/>
+              </a:spcAft>
+              <a:buSzPct val="100000"/>
               <a:buChar char="•"/>
               <a:lnSpc>
                 <a:spcPts val="2200"/>
@@ -21417,10 +21771,12 @@
           </a:bodyPr>
           <a:lstStyle/>
           <a:p>
-            <a:pPr>
-              <a:spcAft>
-                <a:spcPts val="1000"/>
-              </a:spcAft>
+            <a:pPr lvl="0" marL="457200" indent="-228600">
+              <a:buFont typeface="Calibri"/>
+              <a:spcAft>
+                <a:spcPts val="1000"/>
+              </a:spcAft>
+              <a:buSzPct val="100000"/>
               <a:buChar char="•"/>
               <a:lnSpc>
                 <a:spcPts val="2200"/>
@@ -21437,10 +21793,12 @@
             </a:r>
           </a:p>
           <a:p>
-            <a:pPr>
-              <a:spcAft>
-                <a:spcPts val="1000"/>
-              </a:spcAft>
+            <a:pPr lvl="0" marL="457200" indent="-228600">
+              <a:buFont typeface="Calibri"/>
+              <a:spcAft>
+                <a:spcPts val="1000"/>
+              </a:spcAft>
+              <a:buSzPct val="100000"/>
               <a:buChar char="•"/>
               <a:lnSpc>
                 <a:spcPts val="2200"/>
@@ -21457,10 +21815,12 @@
             </a:r>
           </a:p>
           <a:p>
-            <a:pPr>
-              <a:spcAft>
-                <a:spcPts val="1000"/>
-              </a:spcAft>
+            <a:pPr lvl="0" marL="457200" indent="-228600">
+              <a:buFont typeface="Calibri"/>
+              <a:spcAft>
+                <a:spcPts val="1000"/>
+              </a:spcAft>
+              <a:buSzPct val="100000"/>
               <a:buChar char="•"/>
               <a:lnSpc>
                 <a:spcPts val="2200"/>
@@ -21596,10 +21956,12 @@
           </a:bodyPr>
           <a:lstStyle/>
           <a:p>
-            <a:pPr>
-              <a:spcAft>
-                <a:spcPts val="1000"/>
-              </a:spcAft>
+            <a:pPr lvl="0" marL="457200" indent="-228600">
+              <a:buFont typeface="Calibri"/>
+              <a:spcAft>
+                <a:spcPts val="1000"/>
+              </a:spcAft>
+              <a:buSzPct val="100000"/>
               <a:buChar char="•"/>
               <a:lnSpc>
                 <a:spcPts val="2200"/>
@@ -21616,10 +21978,12 @@
             </a:r>
           </a:p>
           <a:p>
-            <a:pPr>
-              <a:spcAft>
-                <a:spcPts val="1000"/>
-              </a:spcAft>
+            <a:pPr lvl="0" marL="457200" indent="-228600">
+              <a:buFont typeface="Calibri"/>
+              <a:spcAft>
+                <a:spcPts val="1000"/>
+              </a:spcAft>
+              <a:buSzPct val="100000"/>
               <a:buChar char="•"/>
               <a:lnSpc>
                 <a:spcPts val="2200"/>
@@ -21636,10 +22000,12 @@
             </a:r>
           </a:p>
           <a:p>
-            <a:pPr>
-              <a:spcAft>
-                <a:spcPts val="1000"/>
-              </a:spcAft>
+            <a:pPr lvl="0" marL="457200" indent="-228600">
+              <a:buFont typeface="Calibri"/>
+              <a:spcAft>
+                <a:spcPts val="1000"/>
+              </a:spcAft>
+              <a:buSzPct val="100000"/>
               <a:buChar char="•"/>
               <a:lnSpc>
                 <a:spcPts val="2200"/>
@@ -21656,10 +22022,12 @@
             </a:r>
           </a:p>
           <a:p>
-            <a:pPr>
-              <a:spcAft>
-                <a:spcPts val="1000"/>
-              </a:spcAft>
+            <a:pPr lvl="0" marL="457200" indent="-228600">
+              <a:buFont typeface="Calibri"/>
+              <a:spcAft>
+                <a:spcPts val="1000"/>
+              </a:spcAft>
+              <a:buSzPct val="100000"/>
               <a:buChar char="•"/>
               <a:lnSpc>
                 <a:spcPts val="2200"/>
@@ -21795,10 +22163,12 @@
           </a:bodyPr>
           <a:lstStyle/>
           <a:p>
-            <a:pPr>
-              <a:spcAft>
-                <a:spcPts val="1000"/>
-              </a:spcAft>
+            <a:pPr lvl="0" marL="457200" indent="-228600">
+              <a:buFont typeface="Calibri"/>
+              <a:spcAft>
+                <a:spcPts val="1000"/>
+              </a:spcAft>
+              <a:buSzPct val="100000"/>
               <a:buChar char="•"/>
               <a:lnSpc>
                 <a:spcPts val="2200"/>
@@ -21815,10 +22185,12 @@
             </a:r>
           </a:p>
           <a:p>
-            <a:pPr>
-              <a:spcAft>
-                <a:spcPts val="1000"/>
-              </a:spcAft>
+            <a:pPr lvl="0" marL="457200" indent="-228600">
+              <a:buFont typeface="Calibri"/>
+              <a:spcAft>
+                <a:spcPts val="1000"/>
+              </a:spcAft>
+              <a:buSzPct val="100000"/>
               <a:buChar char="•"/>
               <a:lnSpc>
                 <a:spcPts val="2200"/>
@@ -21954,10 +22326,12 @@
           </a:bodyPr>
           <a:lstStyle/>
           <a:p>
-            <a:pPr>
-              <a:spcAft>
-                <a:spcPts val="1000"/>
-              </a:spcAft>
+            <a:pPr lvl="0" marL="457200" indent="-228600">
+              <a:buFont typeface="Calibri"/>
+              <a:spcAft>
+                <a:spcPts val="1000"/>
+              </a:spcAft>
+              <a:buSzPct val="100000"/>
               <a:buChar char="•"/>
               <a:lnSpc>
                 <a:spcPts val="2200"/>
@@ -21974,10 +22348,12 @@
             </a:r>
           </a:p>
           <a:p>
-            <a:pPr>
-              <a:spcAft>
-                <a:spcPts val="1000"/>
-              </a:spcAft>
+            <a:pPr lvl="0" marL="457200" indent="-228600">
+              <a:buFont typeface="Calibri"/>
+              <a:spcAft>
+                <a:spcPts val="1000"/>
+              </a:spcAft>
+              <a:buSzPct val="100000"/>
               <a:buChar char="•"/>
               <a:lnSpc>
                 <a:spcPts val="2200"/>
@@ -21994,10 +22370,12 @@
             </a:r>
           </a:p>
           <a:p>
-            <a:pPr>
-              <a:spcAft>
-                <a:spcPts val="1000"/>
-              </a:spcAft>
+            <a:pPr lvl="0" marL="457200" indent="-228600">
+              <a:buFont typeface="Calibri"/>
+              <a:spcAft>
+                <a:spcPts val="1000"/>
+              </a:spcAft>
+              <a:buSzPct val="100000"/>
               <a:buChar char="•"/>
               <a:lnSpc>
                 <a:spcPts val="2200"/>
@@ -22133,10 +22511,12 @@
           </a:bodyPr>
           <a:lstStyle/>
           <a:p>
-            <a:pPr>
-              <a:spcAft>
-                <a:spcPts val="1000"/>
-              </a:spcAft>
+            <a:pPr lvl="0" marL="457200" indent="-228600">
+              <a:buFont typeface="Calibri"/>
+              <a:spcAft>
+                <a:spcPts val="1000"/>
+              </a:spcAft>
+              <a:buSzPct val="100000"/>
               <a:buChar char="•"/>
               <a:lnSpc>
                 <a:spcPts val="2200"/>
@@ -22153,10 +22533,12 @@
             </a:r>
           </a:p>
           <a:p>
-            <a:pPr>
-              <a:spcAft>
-                <a:spcPts val="1000"/>
-              </a:spcAft>
+            <a:pPr lvl="0" marL="457200" indent="-228600">
+              <a:buFont typeface="Calibri"/>
+              <a:spcAft>
+                <a:spcPts val="1000"/>
+              </a:spcAft>
+              <a:buSzPct val="100000"/>
               <a:buChar char="•"/>
               <a:lnSpc>
                 <a:spcPts val="2200"/>
@@ -22292,10 +22674,12 @@
           </a:bodyPr>
           <a:lstStyle/>
           <a:p>
-            <a:pPr>
-              <a:spcAft>
-                <a:spcPts val="1000"/>
-              </a:spcAft>
+            <a:pPr lvl="0" marL="457200" indent="-228600">
+              <a:buFont typeface="Calibri"/>
+              <a:spcAft>
+                <a:spcPts val="1000"/>
+              </a:spcAft>
+              <a:buSzPct val="100000"/>
               <a:buChar char="•"/>
               <a:lnSpc>
                 <a:spcPts val="2200"/>
@@ -22312,10 +22696,12 @@
             </a:r>
           </a:p>
           <a:p>
-            <a:pPr>
-              <a:spcAft>
-                <a:spcPts val="1000"/>
-              </a:spcAft>
+            <a:pPr lvl="0" marL="457200" indent="-228600">
+              <a:buFont typeface="Calibri"/>
+              <a:spcAft>
+                <a:spcPts val="1000"/>
+              </a:spcAft>
+              <a:buSzPct val="100000"/>
               <a:buChar char="•"/>
               <a:lnSpc>
                 <a:spcPts val="2200"/>
@@ -22332,10 +22718,12 @@
             </a:r>
           </a:p>
           <a:p>
-            <a:pPr>
-              <a:spcAft>
-                <a:spcPts val="1000"/>
-              </a:spcAft>
+            <a:pPr lvl="0" marL="457200" indent="-228600">
+              <a:buFont typeface="Calibri"/>
+              <a:spcAft>
+                <a:spcPts val="1000"/>
+              </a:spcAft>
+              <a:buSzPct val="100000"/>
               <a:buChar char="•"/>
               <a:lnSpc>
                 <a:spcPts val="2200"/>
@@ -22471,10 +22859,12 @@
           </a:bodyPr>
           <a:lstStyle/>
           <a:p>
-            <a:pPr>
-              <a:spcAft>
-                <a:spcPts val="1000"/>
-              </a:spcAft>
+            <a:pPr lvl="0" marL="457200" indent="-228600">
+              <a:buFont typeface="Calibri"/>
+              <a:spcAft>
+                <a:spcPts val="1000"/>
+              </a:spcAft>
+              <a:buSzPct val="100000"/>
               <a:buChar char="•"/>
               <a:lnSpc>
                 <a:spcPts val="2200"/>
@@ -22491,10 +22881,12 @@
             </a:r>
           </a:p>
           <a:p>
-            <a:pPr>
-              <a:spcAft>
-                <a:spcPts val="1000"/>
-              </a:spcAft>
+            <a:pPr lvl="0" marL="457200" indent="-228600">
+              <a:buFont typeface="Calibri"/>
+              <a:spcAft>
+                <a:spcPts val="1000"/>
+              </a:spcAft>
+              <a:buSzPct val="100000"/>
               <a:buChar char="•"/>
               <a:lnSpc>
                 <a:spcPts val="2200"/>
@@ -22511,10 +22903,12 @@
             </a:r>
           </a:p>
           <a:p>
-            <a:pPr>
-              <a:spcAft>
-                <a:spcPts val="1000"/>
-              </a:spcAft>
+            <a:pPr lvl="0" marL="457200" indent="-228600">
+              <a:buFont typeface="Calibri"/>
+              <a:spcAft>
+                <a:spcPts val="1000"/>
+              </a:spcAft>
+              <a:buSzPct val="100000"/>
               <a:buChar char="•"/>
               <a:lnSpc>
                 <a:spcPts val="2200"/>
@@ -22650,10 +23044,12 @@
           </a:bodyPr>
           <a:lstStyle/>
           <a:p>
-            <a:pPr>
-              <a:spcAft>
-                <a:spcPts val="1000"/>
-              </a:spcAft>
+            <a:pPr lvl="0" marL="457200" indent="-228600">
+              <a:buFont typeface="Calibri"/>
+              <a:spcAft>
+                <a:spcPts val="1000"/>
+              </a:spcAft>
+              <a:buSzPct val="100000"/>
               <a:buChar char="•"/>
               <a:lnSpc>
                 <a:spcPts val="2200"/>
@@ -22670,10 +23066,12 @@
             </a:r>
           </a:p>
           <a:p>
-            <a:pPr>
-              <a:spcAft>
-                <a:spcPts val="1000"/>
-              </a:spcAft>
+            <a:pPr lvl="0" marL="457200" indent="-228600">
+              <a:buFont typeface="Calibri"/>
+              <a:spcAft>
+                <a:spcPts val="1000"/>
+              </a:spcAft>
+              <a:buSzPct val="100000"/>
               <a:buChar char="•"/>
               <a:lnSpc>
                 <a:spcPts val="2200"/>
@@ -22809,10 +23207,12 @@
           </a:bodyPr>
           <a:lstStyle/>
           <a:p>
-            <a:pPr>
-              <a:spcAft>
-                <a:spcPts val="1000"/>
-              </a:spcAft>
+            <a:pPr lvl="0" marL="457200" indent="-228600">
+              <a:buFont typeface="Calibri"/>
+              <a:spcAft>
+                <a:spcPts val="1000"/>
+              </a:spcAft>
+              <a:buSzPct val="100000"/>
               <a:buChar char="•"/>
               <a:lnSpc>
                 <a:spcPts val="2200"/>
@@ -22829,10 +23229,12 @@
             </a:r>
           </a:p>
           <a:p>
-            <a:pPr>
-              <a:spcAft>
-                <a:spcPts val="1000"/>
-              </a:spcAft>
+            <a:pPr lvl="0" marL="457200" indent="-228600">
+              <a:buFont typeface="Calibri"/>
+              <a:spcAft>
+                <a:spcPts val="1000"/>
+              </a:spcAft>
+              <a:buSzPct val="100000"/>
               <a:buChar char="•"/>
               <a:lnSpc>
                 <a:spcPts val="2200"/>
@@ -22849,10 +23251,12 @@
             </a:r>
           </a:p>
           <a:p>
-            <a:pPr>
-              <a:spcAft>
-                <a:spcPts val="1000"/>
-              </a:spcAft>
+            <a:pPr lvl="0" marL="457200" indent="-228600">
+              <a:buFont typeface="Calibri"/>
+              <a:spcAft>
+                <a:spcPts val="1000"/>
+              </a:spcAft>
+              <a:buSzPct val="100000"/>
               <a:buChar char="•"/>
               <a:lnSpc>
                 <a:spcPts val="2200"/>
@@ -22988,10 +23392,12 @@
           </a:bodyPr>
           <a:lstStyle/>
           <a:p>
-            <a:pPr>
-              <a:spcAft>
-                <a:spcPts val="1000"/>
-              </a:spcAft>
+            <a:pPr lvl="0" marL="457200" indent="-228600">
+              <a:buFont typeface="Calibri"/>
+              <a:spcAft>
+                <a:spcPts val="1000"/>
+              </a:spcAft>
+              <a:buSzPct val="100000"/>
               <a:buChar char="•"/>
               <a:lnSpc>
                 <a:spcPts val="2200"/>
@@ -23008,10 +23414,12 @@
             </a:r>
           </a:p>
           <a:p>
-            <a:pPr>
-              <a:spcAft>
-                <a:spcPts val="1000"/>
-              </a:spcAft>
+            <a:pPr lvl="0" marL="457200" indent="-228600">
+              <a:buFont typeface="Calibri"/>
+              <a:spcAft>
+                <a:spcPts val="1000"/>
+              </a:spcAft>
+              <a:buSzPct val="100000"/>
               <a:buChar char="•"/>
               <a:lnSpc>
                 <a:spcPts val="2200"/>
@@ -23147,10 +23555,12 @@
           </a:bodyPr>
           <a:lstStyle/>
           <a:p>
-            <a:pPr>
-              <a:spcAft>
-                <a:spcPts val="1000"/>
-              </a:spcAft>
+            <a:pPr lvl="0" marL="457200" indent="-228600">
+              <a:buFont typeface="Calibri"/>
+              <a:spcAft>
+                <a:spcPts val="1000"/>
+              </a:spcAft>
+              <a:buSzPct val="100000"/>
               <a:buChar char="•"/>
               <a:lnSpc>
                 <a:spcPts val="2200"/>
@@ -23167,10 +23577,12 @@
             </a:r>
           </a:p>
           <a:p>
-            <a:pPr>
-              <a:spcAft>
-                <a:spcPts val="1000"/>
-              </a:spcAft>
+            <a:pPr lvl="0" marL="457200" indent="-228600">
+              <a:buFont typeface="Calibri"/>
+              <a:spcAft>
+                <a:spcPts val="1000"/>
+              </a:spcAft>
+              <a:buSzPct val="100000"/>
               <a:buChar char="•"/>
               <a:lnSpc>
                 <a:spcPts val="2200"/>
@@ -23187,10 +23599,12 @@
             </a:r>
           </a:p>
           <a:p>
-            <a:pPr>
-              <a:spcAft>
-                <a:spcPts val="1000"/>
-              </a:spcAft>
+            <a:pPr lvl="0" marL="457200" indent="-228600">
+              <a:buFont typeface="Calibri"/>
+              <a:spcAft>
+                <a:spcPts val="1000"/>
+              </a:spcAft>
+              <a:buSzPct val="100000"/>
               <a:buChar char="•"/>
               <a:lnSpc>
                 <a:spcPts val="2200"/>
@@ -23326,10 +23740,12 @@
           </a:bodyPr>
           <a:lstStyle/>
           <a:p>
-            <a:pPr>
-              <a:spcAft>
-                <a:spcPts val="1000"/>
-              </a:spcAft>
+            <a:pPr lvl="0" marL="457200" indent="-228600">
+              <a:buFont typeface="Calibri"/>
+              <a:spcAft>
+                <a:spcPts val="1000"/>
+              </a:spcAft>
+              <a:buSzPct val="100000"/>
               <a:buChar char="•"/>
               <a:lnSpc>
                 <a:spcPts val="2200"/>
@@ -23346,10 +23762,12 @@
             </a:r>
           </a:p>
           <a:p>
-            <a:pPr>
-              <a:spcAft>
-                <a:spcPts val="1000"/>
-              </a:spcAft>
+            <a:pPr lvl="0" marL="457200" indent="-228600">
+              <a:buFont typeface="Calibri"/>
+              <a:spcAft>
+                <a:spcPts val="1000"/>
+              </a:spcAft>
+              <a:buSzPct val="100000"/>
               <a:buChar char="•"/>
               <a:lnSpc>
                 <a:spcPts val="2200"/>
@@ -23366,10 +23784,12 @@
             </a:r>
           </a:p>
           <a:p>
-            <a:pPr>
-              <a:spcAft>
-                <a:spcPts val="1000"/>
-              </a:spcAft>
+            <a:pPr lvl="0" marL="457200" indent="-228600">
+              <a:buFont typeface="Calibri"/>
+              <a:spcAft>
+                <a:spcPts val="1000"/>
+              </a:spcAft>
+              <a:buSzPct val="100000"/>
               <a:buChar char="•"/>
               <a:lnSpc>
                 <a:spcPts val="2200"/>
@@ -23505,10 +23925,12 @@
           </a:bodyPr>
           <a:lstStyle/>
           <a:p>
-            <a:pPr>
-              <a:spcAft>
-                <a:spcPts val="1000"/>
-              </a:spcAft>
+            <a:pPr lvl="0" marL="457200" indent="-228600">
+              <a:buFont typeface="Calibri"/>
+              <a:spcAft>
+                <a:spcPts val="1000"/>
+              </a:spcAft>
+              <a:buSzPct val="100000"/>
               <a:buChar char="•"/>
               <a:lnSpc>
                 <a:spcPts val="2200"/>
@@ -23525,10 +23947,12 @@
             </a:r>
           </a:p>
           <a:p>
-            <a:pPr>
-              <a:spcAft>
-                <a:spcPts val="1000"/>
-              </a:spcAft>
+            <a:pPr lvl="0" marL="457200" indent="-228600">
+              <a:buFont typeface="Calibri"/>
+              <a:spcAft>
+                <a:spcPts val="1000"/>
+              </a:spcAft>
+              <a:buSzPct val="100000"/>
               <a:buChar char="•"/>
               <a:lnSpc>
                 <a:spcPts val="2200"/>
@@ -23664,10 +24088,12 @@
           </a:bodyPr>
           <a:lstStyle/>
           <a:p>
-            <a:pPr>
-              <a:spcAft>
-                <a:spcPts val="1000"/>
-              </a:spcAft>
+            <a:pPr lvl="0" marL="457200" indent="-228600">
+              <a:buFont typeface="Calibri"/>
+              <a:spcAft>
+                <a:spcPts val="1000"/>
+              </a:spcAft>
+              <a:buSzPct val="100000"/>
               <a:buChar char="•"/>
               <a:lnSpc>
                 <a:spcPts val="2200"/>
@@ -23684,10 +24110,12 @@
             </a:r>
           </a:p>
           <a:p>
-            <a:pPr>
-              <a:spcAft>
-                <a:spcPts val="1000"/>
-              </a:spcAft>
+            <a:pPr lvl="0" marL="457200" indent="-228600">
+              <a:buFont typeface="Calibri"/>
+              <a:spcAft>
+                <a:spcPts val="1000"/>
+              </a:spcAft>
+              <a:buSzPct val="100000"/>
               <a:buChar char="•"/>
               <a:lnSpc>
                 <a:spcPts val="2200"/>
@@ -23704,10 +24132,12 @@
             </a:r>
           </a:p>
           <a:p>
-            <a:pPr>
-              <a:spcAft>
-                <a:spcPts val="1000"/>
-              </a:spcAft>
+            <a:pPr lvl="0" marL="457200" indent="-228600">
+              <a:buFont typeface="Calibri"/>
+              <a:spcAft>
+                <a:spcPts val="1000"/>
+              </a:spcAft>
+              <a:buSzPct val="100000"/>
               <a:buChar char="•"/>
               <a:lnSpc>
                 <a:spcPts val="2200"/>
@@ -23843,10 +24273,12 @@
           </a:bodyPr>
           <a:lstStyle/>
           <a:p>
-            <a:pPr>
-              <a:spcAft>
-                <a:spcPts val="1000"/>
-              </a:spcAft>
+            <a:pPr lvl="0" marL="457200" indent="-228600">
+              <a:buFont typeface="Calibri"/>
+              <a:spcAft>
+                <a:spcPts val="1000"/>
+              </a:spcAft>
+              <a:buSzPct val="100000"/>
               <a:buChar char="•"/>
               <a:lnSpc>
                 <a:spcPts val="2200"/>
@@ -23863,10 +24295,12 @@
             </a:r>
           </a:p>
           <a:p>
-            <a:pPr>
-              <a:spcAft>
-                <a:spcPts val="1000"/>
-              </a:spcAft>
+            <a:pPr lvl="0" marL="457200" indent="-228600">
+              <a:buFont typeface="Calibri"/>
+              <a:spcAft>
+                <a:spcPts val="1000"/>
+              </a:spcAft>
+              <a:buSzPct val="100000"/>
               <a:buChar char="•"/>
               <a:lnSpc>
                 <a:spcPts val="2200"/>
@@ -23883,10 +24317,12 @@
             </a:r>
           </a:p>
           <a:p>
-            <a:pPr>
-              <a:spcAft>
-                <a:spcPts val="1000"/>
-              </a:spcAft>
+            <a:pPr lvl="0" marL="457200" indent="-228600">
+              <a:buFont typeface="Calibri"/>
+              <a:spcAft>
+                <a:spcPts val="1000"/>
+              </a:spcAft>
+              <a:buSzPct val="100000"/>
               <a:buChar char="•"/>
               <a:lnSpc>
                 <a:spcPts val="2200"/>
@@ -23903,10 +24339,12 @@
             </a:r>
           </a:p>
           <a:p>
-            <a:pPr>
-              <a:spcAft>
-                <a:spcPts val="1000"/>
-              </a:spcAft>
+            <a:pPr lvl="0" marL="457200" indent="-228600">
+              <a:buFont typeface="Calibri"/>
+              <a:spcAft>
+                <a:spcPts val="1000"/>
+              </a:spcAft>
+              <a:buSzPct val="100000"/>
               <a:buChar char="•"/>
               <a:lnSpc>
                 <a:spcPts val="2200"/>
@@ -24042,10 +24480,12 @@
           </a:bodyPr>
           <a:lstStyle/>
           <a:p>
-            <a:pPr>
-              <a:spcAft>
-                <a:spcPts val="1000"/>
-              </a:spcAft>
+            <a:pPr lvl="0" marL="457200" indent="-228600">
+              <a:buFont typeface="Calibri"/>
+              <a:spcAft>
+                <a:spcPts val="1000"/>
+              </a:spcAft>
+              <a:buSzPct val="100000"/>
               <a:buChar char="•"/>
               <a:lnSpc>
                 <a:spcPts val="2200"/>
@@ -24062,10 +24502,12 @@
             </a:r>
           </a:p>
           <a:p>
-            <a:pPr>
-              <a:spcAft>
-                <a:spcPts val="1000"/>
-              </a:spcAft>
+            <a:pPr lvl="0" marL="457200" indent="-228600">
+              <a:buFont typeface="Calibri"/>
+              <a:spcAft>
+                <a:spcPts val="1000"/>
+              </a:spcAft>
+              <a:buSzPct val="100000"/>
               <a:buChar char="•"/>
               <a:lnSpc>
                 <a:spcPts val="2200"/>
@@ -24082,10 +24524,12 @@
             </a:r>
           </a:p>
           <a:p>
-            <a:pPr>
-              <a:spcAft>
-                <a:spcPts val="1000"/>
-              </a:spcAft>
+            <a:pPr lvl="0" marL="457200" indent="-228600">
+              <a:buFont typeface="Calibri"/>
+              <a:spcAft>
+                <a:spcPts val="1000"/>
+              </a:spcAft>
+              <a:buSzPct val="100000"/>
               <a:buChar char="•"/>
               <a:lnSpc>
                 <a:spcPts val="2200"/>
@@ -24221,10 +24665,12 @@
           </a:bodyPr>
           <a:lstStyle/>
           <a:p>
-            <a:pPr>
-              <a:spcAft>
-                <a:spcPts val="1000"/>
-              </a:spcAft>
+            <a:pPr lvl="0" marL="457200" indent="-228600">
+              <a:buFont typeface="Calibri"/>
+              <a:spcAft>
+                <a:spcPts val="1000"/>
+              </a:spcAft>
+              <a:buSzPct val="100000"/>
               <a:buChar char="•"/>
               <a:lnSpc>
                 <a:spcPts val="2200"/>
@@ -24241,10 +24687,12 @@
             </a:r>
           </a:p>
           <a:p>
-            <a:pPr>
-              <a:spcAft>
-                <a:spcPts val="1000"/>
-              </a:spcAft>
+            <a:pPr lvl="0" marL="457200" indent="-228600">
+              <a:buFont typeface="Calibri"/>
+              <a:spcAft>
+                <a:spcPts val="1000"/>
+              </a:spcAft>
+              <a:buSzPct val="100000"/>
               <a:buChar char="•"/>
               <a:lnSpc>
                 <a:spcPts val="2200"/>
@@ -24380,10 +24828,12 @@
           </a:bodyPr>
           <a:lstStyle/>
           <a:p>
-            <a:pPr>
-              <a:spcAft>
-                <a:spcPts val="1000"/>
-              </a:spcAft>
+            <a:pPr lvl="0" marL="457200" indent="-228600">
+              <a:buFont typeface="Calibri"/>
+              <a:spcAft>
+                <a:spcPts val="1000"/>
+              </a:spcAft>
+              <a:buSzPct val="100000"/>
               <a:buChar char="•"/>
               <a:lnSpc>
                 <a:spcPts val="2200"/>
@@ -24400,10 +24850,12 @@
             </a:r>
           </a:p>
           <a:p>
-            <a:pPr>
-              <a:spcAft>
-                <a:spcPts val="1000"/>
-              </a:spcAft>
+            <a:pPr lvl="0" marL="457200" indent="-228600">
+              <a:buFont typeface="Calibri"/>
+              <a:spcAft>
+                <a:spcPts val="1000"/>
+              </a:spcAft>
+              <a:buSzPct val="100000"/>
               <a:buChar char="•"/>
               <a:lnSpc>
                 <a:spcPts val="2200"/>
@@ -24420,10 +24872,12 @@
             </a:r>
           </a:p>
           <a:p>
-            <a:pPr>
-              <a:spcAft>
-                <a:spcPts val="1000"/>
-              </a:spcAft>
+            <a:pPr lvl="0" marL="457200" indent="-228600">
+              <a:buFont typeface="Calibri"/>
+              <a:spcAft>
+                <a:spcPts val="1000"/>
+              </a:spcAft>
+              <a:buSzPct val="100000"/>
               <a:buChar char="•"/>
               <a:lnSpc>
                 <a:spcPts val="2200"/>
@@ -24440,10 +24894,12 @@
             </a:r>
           </a:p>
           <a:p>
-            <a:pPr>
-              <a:spcAft>
-                <a:spcPts val="1000"/>
-              </a:spcAft>
+            <a:pPr lvl="0" marL="457200" indent="-228600">
+              <a:buFont typeface="Calibri"/>
+              <a:spcAft>
+                <a:spcPts val="1000"/>
+              </a:spcAft>
+              <a:buSzPct val="100000"/>
               <a:buChar char="•"/>
               <a:lnSpc>
                 <a:spcPts val="2200"/>
@@ -24460,10 +24916,12 @@
             </a:r>
           </a:p>
           <a:p>
-            <a:pPr>
-              <a:spcAft>
-                <a:spcPts val="1000"/>
-              </a:spcAft>
+            <a:pPr lvl="0" marL="457200" indent="-228600">
+              <a:buFont typeface="Calibri"/>
+              <a:spcAft>
+                <a:spcPts val="1000"/>
+              </a:spcAft>
+              <a:buSzPct val="100000"/>
               <a:buChar char="•"/>
               <a:lnSpc>
                 <a:spcPts val="2200"/>
@@ -24480,10 +24938,12 @@
             </a:r>
           </a:p>
           <a:p>
-            <a:pPr>
-              <a:spcAft>
-                <a:spcPts val="1000"/>
-              </a:spcAft>
+            <a:pPr lvl="0" marL="457200" indent="-228600">
+              <a:buFont typeface="Calibri"/>
+              <a:spcAft>
+                <a:spcPts val="1000"/>
+              </a:spcAft>
+              <a:buSzPct val="100000"/>
               <a:buChar char="•"/>
               <a:lnSpc>
                 <a:spcPts val="2200"/>
@@ -24619,10 +25079,12 @@
           </a:bodyPr>
           <a:lstStyle/>
           <a:p>
-            <a:pPr>
-              <a:spcAft>
-                <a:spcPts val="1000"/>
-              </a:spcAft>
+            <a:pPr lvl="0" marL="457200" indent="-228600">
+              <a:buFont typeface="Calibri"/>
+              <a:spcAft>
+                <a:spcPts val="1000"/>
+              </a:spcAft>
+              <a:buSzPct val="100000"/>
               <a:buChar char="•"/>
               <a:lnSpc>
                 <a:spcPts val="2200"/>
@@ -24639,10 +25101,12 @@
             </a:r>
           </a:p>
           <a:p>
-            <a:pPr>
-              <a:spcAft>
-                <a:spcPts val="1000"/>
-              </a:spcAft>
+            <a:pPr lvl="0" marL="457200" indent="-228600">
+              <a:buFont typeface="Calibri"/>
+              <a:spcAft>
+                <a:spcPts val="1000"/>
+              </a:spcAft>
+              <a:buSzPct val="100000"/>
               <a:buChar char="•"/>
               <a:lnSpc>
                 <a:spcPts val="2200"/>
@@ -24659,10 +25123,12 @@
             </a:r>
           </a:p>
           <a:p>
-            <a:pPr>
-              <a:spcAft>
-                <a:spcPts val="1000"/>
-              </a:spcAft>
+            <a:pPr lvl="0" marL="457200" indent="-228600">
+              <a:buFont typeface="Calibri"/>
+              <a:spcAft>
+                <a:spcPts val="1000"/>
+              </a:spcAft>
+              <a:buSzPct val="100000"/>
               <a:buChar char="•"/>
               <a:lnSpc>
                 <a:spcPts val="2200"/>
@@ -24798,10 +25264,12 @@
           </a:bodyPr>
           <a:lstStyle/>
           <a:p>
-            <a:pPr>
-              <a:spcAft>
-                <a:spcPts val="1000"/>
-              </a:spcAft>
+            <a:pPr lvl="0" marL="457200" indent="-228600">
+              <a:buFont typeface="Calibri"/>
+              <a:spcAft>
+                <a:spcPts val="1000"/>
+              </a:spcAft>
+              <a:buSzPct val="100000"/>
               <a:buChar char="•"/>
               <a:lnSpc>
                 <a:spcPts val="2200"/>
@@ -24818,10 +25286,12 @@
             </a:r>
           </a:p>
           <a:p>
-            <a:pPr>
-              <a:spcAft>
-                <a:spcPts val="1000"/>
-              </a:spcAft>
+            <a:pPr lvl="0" marL="457200" indent="-228600">
+              <a:buFont typeface="Calibri"/>
+              <a:spcAft>
+                <a:spcPts val="1000"/>
+              </a:spcAft>
+              <a:buSzPct val="100000"/>
               <a:buChar char="•"/>
               <a:lnSpc>
                 <a:spcPts val="2200"/>
@@ -24838,10 +25308,12 @@
             </a:r>
           </a:p>
           <a:p>
-            <a:pPr>
-              <a:spcAft>
-                <a:spcPts val="1000"/>
-              </a:spcAft>
+            <a:pPr lvl="0" marL="457200" indent="-228600">
+              <a:buFont typeface="Calibri"/>
+              <a:spcAft>
+                <a:spcPts val="1000"/>
+              </a:spcAft>
+              <a:buSzPct val="100000"/>
               <a:buChar char="•"/>
               <a:lnSpc>
                 <a:spcPts val="2200"/>
@@ -24977,10 +25449,12 @@
           </a:bodyPr>
           <a:lstStyle/>
           <a:p>
-            <a:pPr>
-              <a:spcAft>
-                <a:spcPts val="1000"/>
-              </a:spcAft>
+            <a:pPr lvl="0" marL="457200" indent="-228600">
+              <a:buFont typeface="Calibri"/>
+              <a:spcAft>
+                <a:spcPts val="1000"/>
+              </a:spcAft>
+              <a:buSzPct val="100000"/>
               <a:buChar char="•"/>
               <a:lnSpc>
                 <a:spcPts val="2200"/>
@@ -24997,10 +25471,12 @@
             </a:r>
           </a:p>
           <a:p>
-            <a:pPr>
-              <a:spcAft>
-                <a:spcPts val="1000"/>
-              </a:spcAft>
+            <a:pPr lvl="0" marL="457200" indent="-228600">
+              <a:buFont typeface="Calibri"/>
+              <a:spcAft>
+                <a:spcPts val="1000"/>
+              </a:spcAft>
+              <a:buSzPct val="100000"/>
               <a:buChar char="•"/>
               <a:lnSpc>
                 <a:spcPts val="2200"/>
@@ -25017,10 +25493,12 @@
             </a:r>
           </a:p>
           <a:p>
-            <a:pPr>
-              <a:spcAft>
-                <a:spcPts val="1000"/>
-              </a:spcAft>
+            <a:pPr lvl="0" marL="457200" indent="-228600">
+              <a:buFont typeface="Calibri"/>
+              <a:spcAft>
+                <a:spcPts val="1000"/>
+              </a:spcAft>
+              <a:buSzPct val="100000"/>
               <a:buChar char="•"/>
               <a:lnSpc>
                 <a:spcPts val="2200"/>
@@ -25037,10 +25515,12 @@
             </a:r>
           </a:p>
           <a:p>
-            <a:pPr>
-              <a:spcAft>
-                <a:spcPts val="1000"/>
-              </a:spcAft>
+            <a:pPr lvl="0" marL="457200" indent="-228600">
+              <a:buFont typeface="Calibri"/>
+              <a:spcAft>
+                <a:spcPts val="1000"/>
+              </a:spcAft>
+              <a:buSzPct val="100000"/>
               <a:buChar char="•"/>
               <a:lnSpc>
                 <a:spcPts val="2200"/>
@@ -25057,10 +25537,12 @@
             </a:r>
           </a:p>
           <a:p>
-            <a:pPr>
-              <a:spcAft>
-                <a:spcPts val="1000"/>
-              </a:spcAft>
+            <a:pPr lvl="0" marL="457200" indent="-228600">
+              <a:buFont typeface="Calibri"/>
+              <a:spcAft>
+                <a:spcPts val="1000"/>
+              </a:spcAft>
+              <a:buSzPct val="100000"/>
               <a:buChar char="•"/>
               <a:lnSpc>
                 <a:spcPts val="2200"/>
@@ -25196,10 +25678,12 @@
           </a:bodyPr>
           <a:lstStyle/>
           <a:p>
-            <a:pPr>
-              <a:spcAft>
-                <a:spcPts val="1000"/>
-              </a:spcAft>
+            <a:pPr lvl="0" marL="457200" indent="-228600">
+              <a:buFont typeface="Calibri"/>
+              <a:spcAft>
+                <a:spcPts val="1000"/>
+              </a:spcAft>
+              <a:buSzPct val="100000"/>
               <a:buChar char="•"/>
               <a:lnSpc>
                 <a:spcPts val="2200"/>
@@ -25216,10 +25700,12 @@
             </a:r>
           </a:p>
           <a:p>
-            <a:pPr>
-              <a:spcAft>
-                <a:spcPts val="1000"/>
-              </a:spcAft>
+            <a:pPr lvl="0" marL="457200" indent="-228600">
+              <a:buFont typeface="Calibri"/>
+              <a:spcAft>
+                <a:spcPts val="1000"/>
+              </a:spcAft>
+              <a:buSzPct val="100000"/>
               <a:buChar char="•"/>
               <a:lnSpc>
                 <a:spcPts val="2200"/>
@@ -25236,10 +25722,12 @@
             </a:r>
           </a:p>
           <a:p>
-            <a:pPr>
-              <a:spcAft>
-                <a:spcPts val="1000"/>
-              </a:spcAft>
+            <a:pPr lvl="0" marL="457200" indent="-228600">
+              <a:buFont typeface="Calibri"/>
+              <a:spcAft>
+                <a:spcPts val="1000"/>
+              </a:spcAft>
+              <a:buSzPct val="100000"/>
               <a:buChar char="•"/>
               <a:lnSpc>
                 <a:spcPts val="2200"/>
@@ -25375,10 +25863,12 @@
           </a:bodyPr>
           <a:lstStyle/>
           <a:p>
-            <a:pPr>
-              <a:spcAft>
-                <a:spcPts val="1000"/>
-              </a:spcAft>
+            <a:pPr lvl="0" marL="457200" indent="-228600">
+              <a:buFont typeface="Calibri"/>
+              <a:spcAft>
+                <a:spcPts val="1000"/>
+              </a:spcAft>
+              <a:buSzPct val="100000"/>
               <a:buChar char="•"/>
               <a:lnSpc>
                 <a:spcPts val="2200"/>
@@ -25395,10 +25885,12 @@
             </a:r>
           </a:p>
           <a:p>
-            <a:pPr>
-              <a:spcAft>
-                <a:spcPts val="1000"/>
-              </a:spcAft>
+            <a:pPr lvl="0" marL="457200" indent="-228600">
+              <a:buFont typeface="Calibri"/>
+              <a:spcAft>
+                <a:spcPts val="1000"/>
+              </a:spcAft>
+              <a:buSzPct val="100000"/>
               <a:buChar char="•"/>
               <a:lnSpc>
                 <a:spcPts val="2200"/>
@@ -25415,10 +25907,12 @@
             </a:r>
           </a:p>
           <a:p>
-            <a:pPr>
-              <a:spcAft>
-                <a:spcPts val="1000"/>
-              </a:spcAft>
+            <a:pPr lvl="0" marL="457200" indent="-228600">
+              <a:buFont typeface="Calibri"/>
+              <a:spcAft>
+                <a:spcPts val="1000"/>
+              </a:spcAft>
+              <a:buSzPct val="100000"/>
               <a:buChar char="•"/>
               <a:lnSpc>
                 <a:spcPts val="2200"/>
@@ -25435,10 +25929,12 @@
             </a:r>
           </a:p>
           <a:p>
-            <a:pPr>
-              <a:spcAft>
-                <a:spcPts val="1000"/>
-              </a:spcAft>
+            <a:pPr lvl="0" marL="457200" indent="-228600">
+              <a:buFont typeface="Calibri"/>
+              <a:spcAft>
+                <a:spcPts val="1000"/>
+              </a:spcAft>
+              <a:buSzPct val="100000"/>
               <a:buChar char="•"/>
               <a:lnSpc>
                 <a:spcPts val="2200"/>
@@ -25574,10 +26070,12 @@
           </a:bodyPr>
           <a:lstStyle/>
           <a:p>
-            <a:pPr>
-              <a:spcAft>
-                <a:spcPts val="1000"/>
-              </a:spcAft>
+            <a:pPr lvl="0" marL="457200" indent="-228600">
+              <a:buFont typeface="Calibri"/>
+              <a:spcAft>
+                <a:spcPts val="1000"/>
+              </a:spcAft>
+              <a:buSzPct val="100000"/>
               <a:buChar char="•"/>
               <a:lnSpc>
                 <a:spcPts val="2200"/>
@@ -25594,10 +26092,12 @@
             </a:r>
           </a:p>
           <a:p>
-            <a:pPr>
-              <a:spcAft>
-                <a:spcPts val="1000"/>
-              </a:spcAft>
+            <a:pPr lvl="0" marL="457200" indent="-228600">
+              <a:buFont typeface="Calibri"/>
+              <a:spcAft>
+                <a:spcPts val="1000"/>
+              </a:spcAft>
+              <a:buSzPct val="100000"/>
               <a:buChar char="•"/>
               <a:lnSpc>
                 <a:spcPts val="2200"/>
@@ -25733,10 +26233,12 @@
           </a:bodyPr>
           <a:lstStyle/>
           <a:p>
-            <a:pPr>
-              <a:spcAft>
-                <a:spcPts val="1000"/>
-              </a:spcAft>
+            <a:pPr lvl="0" marL="457200" indent="-228600">
+              <a:buFont typeface="Calibri"/>
+              <a:spcAft>
+                <a:spcPts val="1000"/>
+              </a:spcAft>
+              <a:buSzPct val="100000"/>
               <a:buChar char="•"/>
               <a:lnSpc>
                 <a:spcPts val="2200"/>
@@ -25753,10 +26255,12 @@
             </a:r>
           </a:p>
           <a:p>
-            <a:pPr>
-              <a:spcAft>
-                <a:spcPts val="1000"/>
-              </a:spcAft>
+            <a:pPr lvl="0" marL="457200" indent="-228600">
+              <a:buFont typeface="Calibri"/>
+              <a:spcAft>
+                <a:spcPts val="1000"/>
+              </a:spcAft>
+              <a:buSzPct val="100000"/>
               <a:buChar char="•"/>
               <a:lnSpc>
                 <a:spcPts val="2200"/>
@@ -25892,10 +26396,12 @@
           </a:bodyPr>
           <a:lstStyle/>
           <a:p>
-            <a:pPr>
-              <a:spcAft>
-                <a:spcPts val="1000"/>
-              </a:spcAft>
+            <a:pPr lvl="0" marL="457200" indent="-228600">
+              <a:buFont typeface="Calibri"/>
+              <a:spcAft>
+                <a:spcPts val="1000"/>
+              </a:spcAft>
+              <a:buSzPct val="100000"/>
               <a:buChar char="•"/>
               <a:lnSpc>
                 <a:spcPts val="2200"/>
@@ -25912,10 +26418,12 @@
             </a:r>
           </a:p>
           <a:p>
-            <a:pPr>
-              <a:spcAft>
-                <a:spcPts val="1000"/>
-              </a:spcAft>
+            <a:pPr lvl="0" marL="457200" indent="-228600">
+              <a:buFont typeface="Calibri"/>
+              <a:spcAft>
+                <a:spcPts val="1000"/>
+              </a:spcAft>
+              <a:buSzPct val="100000"/>
               <a:buChar char="•"/>
               <a:lnSpc>
                 <a:spcPts val="2200"/>
@@ -25932,10 +26440,12 @@
             </a:r>
           </a:p>
           <a:p>
-            <a:pPr>
-              <a:spcAft>
-                <a:spcPts val="1000"/>
-              </a:spcAft>
+            <a:pPr lvl="0" marL="457200" indent="-228600">
+              <a:buFont typeface="Calibri"/>
+              <a:spcAft>
+                <a:spcPts val="1000"/>
+              </a:spcAft>
+              <a:buSzPct val="100000"/>
               <a:buChar char="•"/>
               <a:lnSpc>
                 <a:spcPts val="2200"/>
@@ -26071,10 +26581,12 @@
           </a:bodyPr>
           <a:lstStyle/>
           <a:p>
-            <a:pPr>
-              <a:spcAft>
-                <a:spcPts val="1000"/>
-              </a:spcAft>
+            <a:pPr lvl="0" marL="457200" indent="-228600">
+              <a:buFont typeface="Calibri"/>
+              <a:spcAft>
+                <a:spcPts val="1000"/>
+              </a:spcAft>
+              <a:buSzPct val="100000"/>
               <a:buChar char="•"/>
               <a:lnSpc>
                 <a:spcPts val="2200"/>
@@ -26091,10 +26603,12 @@
             </a:r>
           </a:p>
           <a:p>
-            <a:pPr>
-              <a:spcAft>
-                <a:spcPts val="1000"/>
-              </a:spcAft>
+            <a:pPr lvl="0" marL="457200" indent="-228600">
+              <a:buFont typeface="Calibri"/>
+              <a:spcAft>
+                <a:spcPts val="1000"/>
+              </a:spcAft>
+              <a:buSzPct val="100000"/>
               <a:buChar char="•"/>
               <a:lnSpc>
                 <a:spcPts val="2200"/>
@@ -26230,10 +26744,12 @@
           </a:bodyPr>
           <a:lstStyle/>
           <a:p>
-            <a:pPr>
-              <a:spcAft>
-                <a:spcPts val="1000"/>
-              </a:spcAft>
+            <a:pPr lvl="0" marL="457200" indent="-228600">
+              <a:buFont typeface="Calibri"/>
+              <a:spcAft>
+                <a:spcPts val="1000"/>
+              </a:spcAft>
+              <a:buSzPct val="100000"/>
               <a:buChar char="•"/>
               <a:lnSpc>
                 <a:spcPts val="2200"/>
@@ -26250,10 +26766,12 @@
             </a:r>
           </a:p>
           <a:p>
-            <a:pPr>
-              <a:spcAft>
-                <a:spcPts val="1000"/>
-              </a:spcAft>
+            <a:pPr lvl="0" marL="457200" indent="-228600">
+              <a:buFont typeface="Calibri"/>
+              <a:spcAft>
+                <a:spcPts val="1000"/>
+              </a:spcAft>
+              <a:buSzPct val="100000"/>
               <a:buChar char="•"/>
               <a:lnSpc>
                 <a:spcPts val="2200"/>
@@ -26270,10 +26788,12 @@
             </a:r>
           </a:p>
           <a:p>
-            <a:pPr>
-              <a:spcAft>
-                <a:spcPts val="1000"/>
-              </a:spcAft>
+            <a:pPr lvl="0" marL="457200" indent="-228600">
+              <a:buFont typeface="Calibri"/>
+              <a:spcAft>
+                <a:spcPts val="1000"/>
+              </a:spcAft>
+              <a:buSzPct val="100000"/>
               <a:buChar char="•"/>
               <a:lnSpc>
                 <a:spcPts val="2200"/>
@@ -26409,10 +26929,12 @@
           </a:bodyPr>
           <a:lstStyle/>
           <a:p>
-            <a:pPr>
-              <a:spcAft>
-                <a:spcPts val="1000"/>
-              </a:spcAft>
+            <a:pPr lvl="0" marL="457200" indent="-228600">
+              <a:buFont typeface="Calibri"/>
+              <a:spcAft>
+                <a:spcPts val="1000"/>
+              </a:spcAft>
+              <a:buSzPct val="100000"/>
               <a:buChar char="•"/>
               <a:lnSpc>
                 <a:spcPts val="2200"/>
@@ -26429,10 +26951,12 @@
             </a:r>
           </a:p>
           <a:p>
-            <a:pPr>
-              <a:spcAft>
-                <a:spcPts val="1000"/>
-              </a:spcAft>
+            <a:pPr lvl="0" marL="457200" indent="-228600">
+              <a:buFont typeface="Calibri"/>
+              <a:spcAft>
+                <a:spcPts val="1000"/>
+              </a:spcAft>
+              <a:buSzPct val="100000"/>
               <a:buChar char="•"/>
               <a:lnSpc>
                 <a:spcPts val="2200"/>
@@ -26449,10 +26973,12 @@
             </a:r>
           </a:p>
           <a:p>
-            <a:pPr>
-              <a:spcAft>
-                <a:spcPts val="1000"/>
-              </a:spcAft>
+            <a:pPr lvl="0" marL="457200" indent="-228600">
+              <a:buFont typeface="Calibri"/>
+              <a:spcAft>
+                <a:spcPts val="1000"/>
+              </a:spcAft>
+              <a:buSzPct val="100000"/>
               <a:buChar char="•"/>
               <a:lnSpc>
                 <a:spcPts val="2200"/>
@@ -26588,10 +27114,12 @@
           </a:bodyPr>
           <a:lstStyle/>
           <a:p>
-            <a:pPr>
-              <a:spcAft>
-                <a:spcPts val="1000"/>
-              </a:spcAft>
+            <a:pPr lvl="0" marL="457200" indent="-228600">
+              <a:buFont typeface="Calibri"/>
+              <a:spcAft>
+                <a:spcPts val="1000"/>
+              </a:spcAft>
+              <a:buSzPct val="100000"/>
               <a:buChar char="•"/>
               <a:lnSpc>
                 <a:spcPts val="2200"/>
@@ -26608,10 +27136,12 @@
             </a:r>
           </a:p>
           <a:p>
-            <a:pPr>
-              <a:spcAft>
-                <a:spcPts val="1000"/>
-              </a:spcAft>
+            <a:pPr lvl="0" marL="457200" indent="-228600">
+              <a:buFont typeface="Calibri"/>
+              <a:spcAft>
+                <a:spcPts val="1000"/>
+              </a:spcAft>
+              <a:buSzPct val="100000"/>
               <a:buChar char="•"/>
               <a:lnSpc>
                 <a:spcPts val="2200"/>
@@ -26628,10 +27158,12 @@
             </a:r>
           </a:p>
           <a:p>
-            <a:pPr>
-              <a:spcAft>
-                <a:spcPts val="1000"/>
-              </a:spcAft>
+            <a:pPr lvl="0" marL="457200" indent="-228600">
+              <a:buFont typeface="Calibri"/>
+              <a:spcAft>
+                <a:spcPts val="1000"/>
+              </a:spcAft>
+              <a:buSzPct val="100000"/>
               <a:buChar char="•"/>
               <a:lnSpc>
                 <a:spcPts val="2200"/>
@@ -26767,10 +27299,12 @@
           </a:bodyPr>
           <a:lstStyle/>
           <a:p>
-            <a:pPr>
-              <a:spcAft>
-                <a:spcPts val="1000"/>
-              </a:spcAft>
+            <a:pPr lvl="0" marL="457200" indent="-228600">
+              <a:buFont typeface="Calibri"/>
+              <a:spcAft>
+                <a:spcPts val="1000"/>
+              </a:spcAft>
+              <a:buSzPct val="100000"/>
               <a:buChar char="•"/>
               <a:lnSpc>
                 <a:spcPts val="2200"/>
@@ -26787,10 +27321,12 @@
             </a:r>
           </a:p>
           <a:p>
-            <a:pPr>
-              <a:spcAft>
-                <a:spcPts val="1000"/>
-              </a:spcAft>
+            <a:pPr lvl="0" marL="457200" indent="-228600">
+              <a:buFont typeface="Calibri"/>
+              <a:spcAft>
+                <a:spcPts val="1000"/>
+              </a:spcAft>
+              <a:buSzPct val="100000"/>
               <a:buChar char="•"/>
               <a:lnSpc>
                 <a:spcPts val="2200"/>
@@ -26807,10 +27343,12 @@
             </a:r>
           </a:p>
           <a:p>
-            <a:pPr>
-              <a:spcAft>
-                <a:spcPts val="1000"/>
-              </a:spcAft>
+            <a:pPr lvl="0" marL="457200" indent="-228600">
+              <a:buFont typeface="Calibri"/>
+              <a:spcAft>
+                <a:spcPts val="1000"/>
+              </a:spcAft>
+              <a:buSzPct val="100000"/>
               <a:buChar char="•"/>
               <a:lnSpc>
                 <a:spcPts val="2200"/>
@@ -26827,10 +27365,12 @@
             </a:r>
           </a:p>
           <a:p>
-            <a:pPr>
-              <a:spcAft>
-                <a:spcPts val="1000"/>
-              </a:spcAft>
+            <a:pPr lvl="0" marL="457200" indent="-228600">
+              <a:buFont typeface="Calibri"/>
+              <a:spcAft>
+                <a:spcPts val="1000"/>
+              </a:spcAft>
+              <a:buSzPct val="100000"/>
               <a:buChar char="•"/>
               <a:lnSpc>
                 <a:spcPts val="2200"/>
@@ -26847,10 +27387,12 @@
             </a:r>
           </a:p>
           <a:p>
-            <a:pPr>
-              <a:spcAft>
-                <a:spcPts val="1000"/>
-              </a:spcAft>
+            <a:pPr lvl="0" marL="457200" indent="-228600">
+              <a:buFont typeface="Calibri"/>
+              <a:spcAft>
+                <a:spcPts val="1000"/>
+              </a:spcAft>
+              <a:buSzPct val="100000"/>
               <a:buChar char="•"/>
               <a:lnSpc>
                 <a:spcPts val="2200"/>
@@ -26986,10 +27528,12 @@
           </a:bodyPr>
           <a:lstStyle/>
           <a:p>
-            <a:pPr>
-              <a:spcAft>
-                <a:spcPts val="1000"/>
-              </a:spcAft>
+            <a:pPr lvl="0" marL="457200" indent="-228600">
+              <a:buFont typeface="Calibri"/>
+              <a:spcAft>
+                <a:spcPts val="1000"/>
+              </a:spcAft>
+              <a:buSzPct val="100000"/>
               <a:buChar char="•"/>
               <a:lnSpc>
                 <a:spcPts val="2200"/>
@@ -27006,10 +27550,12 @@
             </a:r>
           </a:p>
           <a:p>
-            <a:pPr>
-              <a:spcAft>
-                <a:spcPts val="1000"/>
-              </a:spcAft>
+            <a:pPr lvl="0" marL="457200" indent="-228600">
+              <a:buFont typeface="Calibri"/>
+              <a:spcAft>
+                <a:spcPts val="1000"/>
+              </a:spcAft>
+              <a:buSzPct val="100000"/>
               <a:buChar char="•"/>
               <a:lnSpc>
                 <a:spcPts val="2200"/>
@@ -27026,10 +27572,12 @@
             </a:r>
           </a:p>
           <a:p>
-            <a:pPr>
-              <a:spcAft>
-                <a:spcPts val="1000"/>
-              </a:spcAft>
+            <a:pPr lvl="0" marL="457200" indent="-228600">
+              <a:buFont typeface="Calibri"/>
+              <a:spcAft>
+                <a:spcPts val="1000"/>
+              </a:spcAft>
+              <a:buSzPct val="100000"/>
               <a:buChar char="•"/>
               <a:lnSpc>
                 <a:spcPts val="2200"/>
@@ -27046,10 +27594,12 @@
             </a:r>
           </a:p>
           <a:p>
-            <a:pPr>
-              <a:spcAft>
-                <a:spcPts val="1000"/>
-              </a:spcAft>
+            <a:pPr lvl="0" marL="457200" indent="-228600">
+              <a:buFont typeface="Calibri"/>
+              <a:spcAft>
+                <a:spcPts val="1000"/>
+              </a:spcAft>
+              <a:buSzPct val="100000"/>
               <a:buChar char="•"/>
               <a:lnSpc>
                 <a:spcPts val="2200"/>
@@ -27185,10 +27735,12 @@
           </a:bodyPr>
           <a:lstStyle/>
           <a:p>
-            <a:pPr>
-              <a:spcAft>
-                <a:spcPts val="1000"/>
-              </a:spcAft>
+            <a:pPr lvl="0" marL="457200" indent="-228600">
+              <a:buFont typeface="Calibri"/>
+              <a:spcAft>
+                <a:spcPts val="1000"/>
+              </a:spcAft>
+              <a:buSzPct val="100000"/>
               <a:buChar char="•"/>
               <a:lnSpc>
                 <a:spcPts val="2200"/>
@@ -27205,10 +27757,12 @@
             </a:r>
           </a:p>
           <a:p>
-            <a:pPr>
-              <a:spcAft>
-                <a:spcPts val="1000"/>
-              </a:spcAft>
+            <a:pPr lvl="0" marL="457200" indent="-228600">
+              <a:buFont typeface="Calibri"/>
+              <a:spcAft>
+                <a:spcPts val="1000"/>
+              </a:spcAft>
+              <a:buSzPct val="100000"/>
               <a:buChar char="•"/>
               <a:lnSpc>
                 <a:spcPts val="2200"/>
@@ -27225,10 +27779,12 @@
             </a:r>
           </a:p>
           <a:p>
-            <a:pPr>
-              <a:spcAft>
-                <a:spcPts val="1000"/>
-              </a:spcAft>
+            <a:pPr lvl="0" marL="457200" indent="-228600">
+              <a:buFont typeface="Calibri"/>
+              <a:spcAft>
+                <a:spcPts val="1000"/>
+              </a:spcAft>
+              <a:buSzPct val="100000"/>
               <a:buChar char="•"/>
               <a:lnSpc>
                 <a:spcPts val="2200"/>
@@ -27364,10 +27920,12 @@
           </a:bodyPr>
           <a:lstStyle/>
           <a:p>
-            <a:pPr>
-              <a:spcAft>
-                <a:spcPts val="1000"/>
-              </a:spcAft>
+            <a:pPr lvl="0" marL="457200" indent="-228600">
+              <a:buFont typeface="Calibri"/>
+              <a:spcAft>
+                <a:spcPts val="1000"/>
+              </a:spcAft>
+              <a:buSzPct val="100000"/>
               <a:buChar char="•"/>
               <a:lnSpc>
                 <a:spcPts val="2200"/>
@@ -27384,10 +27942,12 @@
             </a:r>
           </a:p>
           <a:p>
-            <a:pPr>
-              <a:spcAft>
-                <a:spcPts val="1000"/>
-              </a:spcAft>
+            <a:pPr lvl="0" marL="457200" indent="-228600">
+              <a:buFont typeface="Calibri"/>
+              <a:spcAft>
+                <a:spcPts val="1000"/>
+              </a:spcAft>
+              <a:buSzPct val="100000"/>
               <a:buChar char="•"/>
               <a:lnSpc>
                 <a:spcPts val="2200"/>
@@ -27404,10 +27964,12 @@
             </a:r>
           </a:p>
           <a:p>
-            <a:pPr>
-              <a:spcAft>
-                <a:spcPts val="1000"/>
-              </a:spcAft>
+            <a:pPr lvl="0" marL="457200" indent="-228600">
+              <a:buFont typeface="Calibri"/>
+              <a:spcAft>
+                <a:spcPts val="1000"/>
+              </a:spcAft>
+              <a:buSzPct val="100000"/>
               <a:buChar char="•"/>
               <a:lnSpc>
                 <a:spcPts val="2200"/>
@@ -27424,10 +27986,12 @@
             </a:r>
           </a:p>
           <a:p>
-            <a:pPr>
-              <a:spcAft>
-                <a:spcPts val="1000"/>
-              </a:spcAft>
+            <a:pPr lvl="0" marL="457200" indent="-228600">
+              <a:buFont typeface="Calibri"/>
+              <a:spcAft>
+                <a:spcPts val="1000"/>
+              </a:spcAft>
+              <a:buSzPct val="100000"/>
               <a:buChar char="•"/>
               <a:lnSpc>
                 <a:spcPts val="2200"/>
@@ -27563,10 +28127,12 @@
           </a:bodyPr>
           <a:lstStyle/>
           <a:p>
-            <a:pPr>
-              <a:spcAft>
-                <a:spcPts val="1000"/>
-              </a:spcAft>
+            <a:pPr lvl="0" marL="457200" indent="-228600">
+              <a:buFont typeface="Calibri"/>
+              <a:spcAft>
+                <a:spcPts val="1000"/>
+              </a:spcAft>
+              <a:buSzPct val="100000"/>
               <a:buChar char="•"/>
               <a:lnSpc>
                 <a:spcPts val="2200"/>
@@ -27583,10 +28149,12 @@
             </a:r>
           </a:p>
           <a:p>
-            <a:pPr>
-              <a:spcAft>
-                <a:spcPts val="1000"/>
-              </a:spcAft>
+            <a:pPr lvl="0" marL="457200" indent="-228600">
+              <a:buFont typeface="Calibri"/>
+              <a:spcAft>
+                <a:spcPts val="1000"/>
+              </a:spcAft>
+              <a:buSzPct val="100000"/>
               <a:buChar char="•"/>
               <a:lnSpc>
                 <a:spcPts val="2200"/>
@@ -27603,10 +28171,12 @@
             </a:r>
           </a:p>
           <a:p>
-            <a:pPr>
-              <a:spcAft>
-                <a:spcPts val="1000"/>
-              </a:spcAft>
+            <a:pPr lvl="0" marL="457200" indent="-228600">
+              <a:buFont typeface="Calibri"/>
+              <a:spcAft>
+                <a:spcPts val="1000"/>
+              </a:spcAft>
+              <a:buSzPct val="100000"/>
               <a:buChar char="•"/>
               <a:lnSpc>
                 <a:spcPts val="2200"/>
@@ -27742,10 +28312,12 @@
           </a:bodyPr>
           <a:lstStyle/>
           <a:p>
-            <a:pPr>
-              <a:spcAft>
-                <a:spcPts val="1000"/>
-              </a:spcAft>
+            <a:pPr lvl="0" marL="457200" indent="-228600">
+              <a:buFont typeface="Calibri"/>
+              <a:spcAft>
+                <a:spcPts val="1000"/>
+              </a:spcAft>
+              <a:buSzPct val="100000"/>
               <a:buChar char="•"/>
               <a:lnSpc>
                 <a:spcPts val="2200"/>
@@ -27762,10 +28334,12 @@
             </a:r>
           </a:p>
           <a:p>
-            <a:pPr>
-              <a:spcAft>
-                <a:spcPts val="1000"/>
-              </a:spcAft>
+            <a:pPr lvl="0" marL="457200" indent="-228600">
+              <a:buFont typeface="Calibri"/>
+              <a:spcAft>
+                <a:spcPts val="1000"/>
+              </a:spcAft>
+              <a:buSzPct val="100000"/>
               <a:buChar char="•"/>
               <a:lnSpc>
                 <a:spcPts val="2200"/>
@@ -27782,10 +28356,12 @@
             </a:r>
           </a:p>
           <a:p>
-            <a:pPr>
-              <a:spcAft>
-                <a:spcPts val="1000"/>
-              </a:spcAft>
+            <a:pPr lvl="0" marL="457200" indent="-228600">
+              <a:buFont typeface="Calibri"/>
+              <a:spcAft>
+                <a:spcPts val="1000"/>
+              </a:spcAft>
+              <a:buSzPct val="100000"/>
               <a:buChar char="•"/>
               <a:lnSpc>
                 <a:spcPts val="2200"/>
@@ -27921,10 +28497,12 @@
           </a:bodyPr>
           <a:lstStyle/>
           <a:p>
-            <a:pPr>
-              <a:spcAft>
-                <a:spcPts val="1000"/>
-              </a:spcAft>
+            <a:pPr lvl="0" marL="457200" indent="-228600">
+              <a:buFont typeface="Calibri"/>
+              <a:spcAft>
+                <a:spcPts val="1000"/>
+              </a:spcAft>
+              <a:buSzPct val="100000"/>
               <a:buChar char="•"/>
               <a:lnSpc>
                 <a:spcPts val="2200"/>
@@ -27941,10 +28519,12 @@
             </a:r>
           </a:p>
           <a:p>
-            <a:pPr>
-              <a:spcAft>
-                <a:spcPts val="1000"/>
-              </a:spcAft>
+            <a:pPr lvl="0" marL="457200" indent="-228600">
+              <a:buFont typeface="Calibri"/>
+              <a:spcAft>
+                <a:spcPts val="1000"/>
+              </a:spcAft>
+              <a:buSzPct val="100000"/>
               <a:buChar char="•"/>
               <a:lnSpc>
                 <a:spcPts val="2200"/>
@@ -28080,10 +28660,12 @@
           </a:bodyPr>
           <a:lstStyle/>
           <a:p>
-            <a:pPr>
-              <a:spcAft>
-                <a:spcPts val="1000"/>
-              </a:spcAft>
+            <a:pPr lvl="0" marL="457200" indent="-228600">
+              <a:buFont typeface="Calibri"/>
+              <a:spcAft>
+                <a:spcPts val="1000"/>
+              </a:spcAft>
+              <a:buSzPct val="100000"/>
               <a:buChar char="•"/>
               <a:lnSpc>
                 <a:spcPts val="2200"/>
@@ -28100,10 +28682,12 @@
             </a:r>
           </a:p>
           <a:p>
-            <a:pPr>
-              <a:spcAft>
-                <a:spcPts val="1000"/>
-              </a:spcAft>
+            <a:pPr lvl="0" marL="457200" indent="-228600">
+              <a:buFont typeface="Calibri"/>
+              <a:spcAft>
+                <a:spcPts val="1000"/>
+              </a:spcAft>
+              <a:buSzPct val="100000"/>
               <a:buChar char="•"/>
               <a:lnSpc>
                 <a:spcPts val="2200"/>
@@ -28120,10 +28704,12 @@
             </a:r>
           </a:p>
           <a:p>
-            <a:pPr>
-              <a:spcAft>
-                <a:spcPts val="1000"/>
-              </a:spcAft>
+            <a:pPr lvl="0" marL="457200" indent="-228600">
+              <a:buFont typeface="Calibri"/>
+              <a:spcAft>
+                <a:spcPts val="1000"/>
+              </a:spcAft>
+              <a:buSzPct val="100000"/>
               <a:buChar char="•"/>
               <a:lnSpc>
                 <a:spcPts val="2200"/>
@@ -28259,10 +28845,12 @@
           </a:bodyPr>
           <a:lstStyle/>
           <a:p>
-            <a:pPr>
-              <a:spcAft>
-                <a:spcPts val="1000"/>
-              </a:spcAft>
+            <a:pPr lvl="0" marL="457200" indent="-228600">
+              <a:buFont typeface="Calibri"/>
+              <a:spcAft>
+                <a:spcPts val="1000"/>
+              </a:spcAft>
+              <a:buSzPct val="100000"/>
               <a:buChar char="•"/>
               <a:lnSpc>
                 <a:spcPts val="2200"/>
@@ -28279,10 +28867,12 @@
             </a:r>
           </a:p>
           <a:p>
-            <a:pPr>
-              <a:spcAft>
-                <a:spcPts val="1000"/>
-              </a:spcAft>
+            <a:pPr lvl="0" marL="457200" indent="-228600">
+              <a:buFont typeface="Calibri"/>
+              <a:spcAft>
+                <a:spcPts val="1000"/>
+              </a:spcAft>
+              <a:buSzPct val="100000"/>
               <a:buChar char="•"/>
               <a:lnSpc>
                 <a:spcPts val="2200"/>
@@ -28299,10 +28889,12 @@
             </a:r>
           </a:p>
           <a:p>
-            <a:pPr>
-              <a:spcAft>
-                <a:spcPts val="1000"/>
-              </a:spcAft>
+            <a:pPr lvl="0" marL="457200" indent="-228600">
+              <a:buFont typeface="Calibri"/>
+              <a:spcAft>
+                <a:spcPts val="1000"/>
+              </a:spcAft>
+              <a:buSzPct val="100000"/>
               <a:buChar char="•"/>
               <a:lnSpc>
                 <a:spcPts val="2200"/>
@@ -28319,10 +28911,12 @@
             </a:r>
           </a:p>
           <a:p>
-            <a:pPr>
-              <a:spcAft>
-                <a:spcPts val="1000"/>
-              </a:spcAft>
+            <a:pPr lvl="0" marL="457200" indent="-228600">
+              <a:buFont typeface="Calibri"/>
+              <a:spcAft>
+                <a:spcPts val="1000"/>
+              </a:spcAft>
+              <a:buSzPct val="100000"/>
               <a:buChar char="•"/>
               <a:lnSpc>
                 <a:spcPts val="2200"/>
@@ -28458,10 +29052,12 @@
           </a:bodyPr>
           <a:lstStyle/>
           <a:p>
-            <a:pPr>
-              <a:spcAft>
-                <a:spcPts val="1000"/>
-              </a:spcAft>
+            <a:pPr lvl="0" marL="457200" indent="-228600">
+              <a:buFont typeface="Calibri"/>
+              <a:spcAft>
+                <a:spcPts val="1000"/>
+              </a:spcAft>
+              <a:buSzPct val="100000"/>
               <a:buChar char="•"/>
               <a:lnSpc>
                 <a:spcPts val="2200"/>
@@ -28478,10 +29074,12 @@
             </a:r>
           </a:p>
           <a:p>
-            <a:pPr>
-              <a:spcAft>
-                <a:spcPts val="1000"/>
-              </a:spcAft>
+            <a:pPr lvl="0" marL="457200" indent="-228600">
+              <a:buFont typeface="Calibri"/>
+              <a:spcAft>
+                <a:spcPts val="1000"/>
+              </a:spcAft>
+              <a:buSzPct val="100000"/>
               <a:buChar char="•"/>
               <a:lnSpc>
                 <a:spcPts val="2200"/>
@@ -28617,10 +29215,12 @@
           </a:bodyPr>
           <a:lstStyle/>
           <a:p>
-            <a:pPr>
-              <a:spcAft>
-                <a:spcPts val="1000"/>
-              </a:spcAft>
+            <a:pPr lvl="0" marL="457200" indent="-228600">
+              <a:buFont typeface="Calibri"/>
+              <a:spcAft>
+                <a:spcPts val="1000"/>
+              </a:spcAft>
+              <a:buSzPct val="100000"/>
               <a:buChar char="•"/>
               <a:lnSpc>
                 <a:spcPts val="2200"/>
@@ -28637,10 +29237,12 @@
             </a:r>
           </a:p>
           <a:p>
-            <a:pPr>
-              <a:spcAft>
-                <a:spcPts val="1000"/>
-              </a:spcAft>
+            <a:pPr lvl="0" marL="457200" indent="-228600">
+              <a:buFont typeface="Calibri"/>
+              <a:spcAft>
+                <a:spcPts val="1000"/>
+              </a:spcAft>
+              <a:buSzPct val="100000"/>
               <a:buChar char="•"/>
               <a:lnSpc>
                 <a:spcPts val="2200"/>
@@ -28657,10 +29259,12 @@
             </a:r>
           </a:p>
           <a:p>
-            <a:pPr>
-              <a:spcAft>
-                <a:spcPts val="1000"/>
-              </a:spcAft>
+            <a:pPr lvl="0" marL="457200" indent="-228600">
+              <a:buFont typeface="Calibri"/>
+              <a:spcAft>
+                <a:spcPts val="1000"/>
+              </a:spcAft>
+              <a:buSzPct val="100000"/>
               <a:buChar char="•"/>
               <a:lnSpc>
                 <a:spcPts val="2200"/>
@@ -28677,10 +29281,12 @@
             </a:r>
           </a:p>
           <a:p>
-            <a:pPr>
-              <a:spcAft>
-                <a:spcPts val="1000"/>
-              </a:spcAft>
+            <a:pPr lvl="0" marL="457200" indent="-228600">
+              <a:buFont typeface="Calibri"/>
+              <a:spcAft>
+                <a:spcPts val="1000"/>
+              </a:spcAft>
+              <a:buSzPct val="100000"/>
               <a:buChar char="•"/>
               <a:lnSpc>
                 <a:spcPts val="2200"/>
@@ -28697,10 +29303,12 @@
             </a:r>
           </a:p>
           <a:p>
-            <a:pPr>
-              <a:spcAft>
-                <a:spcPts val="1000"/>
-              </a:spcAft>
+            <a:pPr lvl="0" marL="457200" indent="-228600">
+              <a:buFont typeface="Calibri"/>
+              <a:spcAft>
+                <a:spcPts val="1000"/>
+              </a:spcAft>
+              <a:buSzPct val="100000"/>
               <a:buChar char="•"/>
               <a:lnSpc>
                 <a:spcPts val="2200"/>
@@ -28836,10 +29444,12 @@
           </a:bodyPr>
           <a:lstStyle/>
           <a:p>
-            <a:pPr>
-              <a:spcAft>
-                <a:spcPts val="1000"/>
-              </a:spcAft>
+            <a:pPr lvl="0" marL="457200" indent="-228600">
+              <a:buFont typeface="Calibri"/>
+              <a:spcAft>
+                <a:spcPts val="1000"/>
+              </a:spcAft>
+              <a:buSzPct val="100000"/>
               <a:buChar char="•"/>
               <a:lnSpc>
                 <a:spcPts val="2200"/>
@@ -28856,10 +29466,12 @@
             </a:r>
           </a:p>
           <a:p>
-            <a:pPr>
-              <a:spcAft>
-                <a:spcPts val="1000"/>
-              </a:spcAft>
+            <a:pPr lvl="0" marL="457200" indent="-228600">
+              <a:buFont typeface="Calibri"/>
+              <a:spcAft>
+                <a:spcPts val="1000"/>
+              </a:spcAft>
+              <a:buSzPct val="100000"/>
               <a:buChar char="•"/>
               <a:lnSpc>
                 <a:spcPts val="2200"/>
@@ -28876,10 +29488,12 @@
             </a:r>
           </a:p>
           <a:p>
-            <a:pPr>
-              <a:spcAft>
-                <a:spcPts val="1000"/>
-              </a:spcAft>
+            <a:pPr lvl="0" marL="457200" indent="-228600">
+              <a:buFont typeface="Calibri"/>
+              <a:spcAft>
+                <a:spcPts val="1000"/>
+              </a:spcAft>
+              <a:buSzPct val="100000"/>
               <a:buChar char="•"/>
               <a:lnSpc>
                 <a:spcPts val="2200"/>
@@ -29015,10 +29629,12 @@
           </a:bodyPr>
           <a:lstStyle/>
           <a:p>
-            <a:pPr>
-              <a:spcAft>
-                <a:spcPts val="1000"/>
-              </a:spcAft>
+            <a:pPr lvl="0" marL="457200" indent="-228600">
+              <a:buFont typeface="Calibri"/>
+              <a:spcAft>
+                <a:spcPts val="1000"/>
+              </a:spcAft>
+              <a:buSzPct val="100000"/>
               <a:buChar char="•"/>
               <a:lnSpc>
                 <a:spcPts val="2200"/>
@@ -29035,10 +29651,12 @@
             </a:r>
           </a:p>
           <a:p>
-            <a:pPr>
-              <a:spcAft>
-                <a:spcPts val="1000"/>
-              </a:spcAft>
+            <a:pPr lvl="0" marL="457200" indent="-228600">
+              <a:buFont typeface="Calibri"/>
+              <a:spcAft>
+                <a:spcPts val="1000"/>
+              </a:spcAft>
+              <a:buSzPct val="100000"/>
               <a:buChar char="•"/>
               <a:lnSpc>
                 <a:spcPts val="2200"/>
@@ -29055,10 +29673,12 @@
             </a:r>
           </a:p>
           <a:p>
-            <a:pPr>
-              <a:spcAft>
-                <a:spcPts val="1000"/>
-              </a:spcAft>
+            <a:pPr lvl="0" marL="457200" indent="-228600">
+              <a:buFont typeface="Calibri"/>
+              <a:spcAft>
+                <a:spcPts val="1000"/>
+              </a:spcAft>
+              <a:buSzPct val="100000"/>
               <a:buChar char="•"/>
               <a:lnSpc>
                 <a:spcPts val="2200"/>
@@ -29075,10 +29695,12 @@
             </a:r>
           </a:p>
           <a:p>
-            <a:pPr>
-              <a:spcAft>
-                <a:spcPts val="1000"/>
-              </a:spcAft>
+            <a:pPr lvl="0" marL="457200" indent="-228600">
+              <a:buFont typeface="Calibri"/>
+              <a:spcAft>
+                <a:spcPts val="1000"/>
+              </a:spcAft>
+              <a:buSzPct val="100000"/>
               <a:buChar char="•"/>
               <a:lnSpc>
                 <a:spcPts val="2200"/>
@@ -29095,10 +29717,12 @@
             </a:r>
           </a:p>
           <a:p>
-            <a:pPr>
-              <a:spcAft>
-                <a:spcPts val="1000"/>
-              </a:spcAft>
+            <a:pPr lvl="0" marL="457200" indent="-228600">
+              <a:buFont typeface="Calibri"/>
+              <a:spcAft>
+                <a:spcPts val="1000"/>
+              </a:spcAft>
+              <a:buSzPct val="100000"/>
               <a:buChar char="•"/>
               <a:lnSpc>
                 <a:spcPts val="2200"/>
@@ -29234,10 +29858,12 @@
           </a:bodyPr>
           <a:lstStyle/>
           <a:p>
-            <a:pPr>
-              <a:spcAft>
-                <a:spcPts val="1000"/>
-              </a:spcAft>
+            <a:pPr lvl="0" marL="457200" indent="-228600">
+              <a:buFont typeface="Calibri"/>
+              <a:spcAft>
+                <a:spcPts val="1000"/>
+              </a:spcAft>
+              <a:buSzPct val="100000"/>
               <a:buChar char="•"/>
               <a:lnSpc>
                 <a:spcPts val="2200"/>
@@ -29254,10 +29880,12 @@
             </a:r>
           </a:p>
           <a:p>
-            <a:pPr>
-              <a:spcAft>
-                <a:spcPts val="1000"/>
-              </a:spcAft>
+            <a:pPr lvl="0" marL="457200" indent="-228600">
+              <a:buFont typeface="Calibri"/>
+              <a:spcAft>
+                <a:spcPts val="1000"/>
+              </a:spcAft>
+              <a:buSzPct val="100000"/>
               <a:buChar char="•"/>
               <a:lnSpc>
                 <a:spcPts val="2200"/>
@@ -29274,10 +29902,12 @@
             </a:r>
           </a:p>
           <a:p>
-            <a:pPr>
-              <a:spcAft>
-                <a:spcPts val="1000"/>
-              </a:spcAft>
+            <a:pPr lvl="0" marL="457200" indent="-228600">
+              <a:buFont typeface="Calibri"/>
+              <a:spcAft>
+                <a:spcPts val="1000"/>
+              </a:spcAft>
+              <a:buSzPct val="100000"/>
               <a:buChar char="•"/>
               <a:lnSpc>
                 <a:spcPts val="2200"/>
@@ -29294,10 +29924,12 @@
             </a:r>
           </a:p>
           <a:p>
-            <a:pPr>
-              <a:spcAft>
-                <a:spcPts val="1000"/>
-              </a:spcAft>
+            <a:pPr lvl="0" marL="457200" indent="-228600">
+              <a:buFont typeface="Calibri"/>
+              <a:spcAft>
+                <a:spcPts val="1000"/>
+              </a:spcAft>
+              <a:buSzPct val="100000"/>
               <a:buChar char="•"/>
               <a:lnSpc>
                 <a:spcPts val="2200"/>
@@ -29314,10 +29946,12 @@
             </a:r>
           </a:p>
           <a:p>
-            <a:pPr>
-              <a:spcAft>
-                <a:spcPts val="1000"/>
-              </a:spcAft>
+            <a:pPr lvl="0" marL="457200" indent="-228600">
+              <a:buFont typeface="Calibri"/>
+              <a:spcAft>
+                <a:spcPts val="1000"/>
+              </a:spcAft>
+              <a:buSzPct val="100000"/>
               <a:buChar char="•"/>
               <a:lnSpc>
                 <a:spcPts val="2200"/>
@@ -29453,10 +30087,12 @@
           </a:bodyPr>
           <a:lstStyle/>
           <a:p>
-            <a:pPr>
-              <a:spcAft>
-                <a:spcPts val="1000"/>
-              </a:spcAft>
+            <a:pPr lvl="0" marL="457200" indent="-228600">
+              <a:buFont typeface="Calibri"/>
+              <a:spcAft>
+                <a:spcPts val="1000"/>
+              </a:spcAft>
+              <a:buSzPct val="100000"/>
               <a:buChar char="•"/>
               <a:lnSpc>
                 <a:spcPts val="2200"/>
@@ -29473,10 +30109,12 @@
             </a:r>
           </a:p>
           <a:p>
-            <a:pPr>
-              <a:spcAft>
-                <a:spcPts val="1000"/>
-              </a:spcAft>
+            <a:pPr lvl="0" marL="457200" indent="-228600">
+              <a:buFont typeface="Calibri"/>
+              <a:spcAft>
+                <a:spcPts val="1000"/>
+              </a:spcAft>
+              <a:buSzPct val="100000"/>
               <a:buChar char="•"/>
               <a:lnSpc>
                 <a:spcPts val="2200"/>
@@ -29493,10 +30131,12 @@
             </a:r>
           </a:p>
           <a:p>
-            <a:pPr>
-              <a:spcAft>
-                <a:spcPts val="1000"/>
-              </a:spcAft>
+            <a:pPr lvl="0" marL="457200" indent="-228600">
+              <a:buFont typeface="Calibri"/>
+              <a:spcAft>
+                <a:spcPts val="1000"/>
+              </a:spcAft>
+              <a:buSzPct val="100000"/>
               <a:buChar char="•"/>
               <a:lnSpc>
                 <a:spcPts val="2200"/>
@@ -29632,10 +30272,12 @@
           </a:bodyPr>
           <a:lstStyle/>
           <a:p>
-            <a:pPr>
-              <a:spcAft>
-                <a:spcPts val="1000"/>
-              </a:spcAft>
+            <a:pPr lvl="0" marL="457200" indent="-228600">
+              <a:buFont typeface="Calibri"/>
+              <a:spcAft>
+                <a:spcPts val="1000"/>
+              </a:spcAft>
+              <a:buSzPct val="100000"/>
               <a:buChar char="•"/>
               <a:lnSpc>
                 <a:spcPts val="2200"/>
@@ -29652,10 +30294,12 @@
             </a:r>
           </a:p>
           <a:p>
-            <a:pPr>
-              <a:spcAft>
-                <a:spcPts val="1000"/>
-              </a:spcAft>
+            <a:pPr lvl="0" marL="457200" indent="-228600">
+              <a:buFont typeface="Calibri"/>
+              <a:spcAft>
+                <a:spcPts val="1000"/>
+              </a:spcAft>
+              <a:buSzPct val="100000"/>
               <a:buChar char="•"/>
               <a:lnSpc>
                 <a:spcPts val="2200"/>
@@ -29672,10 +30316,12 @@
             </a:r>
           </a:p>
           <a:p>
-            <a:pPr>
-              <a:spcAft>
-                <a:spcPts val="1000"/>
-              </a:spcAft>
+            <a:pPr lvl="0" marL="457200" indent="-228600">
+              <a:buFont typeface="Calibri"/>
+              <a:spcAft>
+                <a:spcPts val="1000"/>
+              </a:spcAft>
+              <a:buSzPct val="100000"/>
               <a:buChar char="•"/>
               <a:lnSpc>
                 <a:spcPts val="2200"/>
@@ -29811,10 +30457,12 @@
           </a:bodyPr>
           <a:lstStyle/>
           <a:p>
-            <a:pPr>
-              <a:spcAft>
-                <a:spcPts val="1000"/>
-              </a:spcAft>
+            <a:pPr lvl="0" marL="457200" indent="-228600">
+              <a:buFont typeface="Calibri"/>
+              <a:spcAft>
+                <a:spcPts val="1000"/>
+              </a:spcAft>
+              <a:buSzPct val="100000"/>
               <a:buChar char="•"/>
               <a:lnSpc>
                 <a:spcPts val="2200"/>
@@ -29831,10 +30479,12 @@
             </a:r>
           </a:p>
           <a:p>
-            <a:pPr>
-              <a:spcAft>
-                <a:spcPts val="1000"/>
-              </a:spcAft>
+            <a:pPr lvl="0" marL="457200" indent="-228600">
+              <a:buFont typeface="Calibri"/>
+              <a:spcAft>
+                <a:spcPts val="1000"/>
+              </a:spcAft>
+              <a:buSzPct val="100000"/>
               <a:buChar char="•"/>
               <a:lnSpc>
                 <a:spcPts val="2200"/>
@@ -29970,10 +30620,12 @@
           </a:bodyPr>
           <a:lstStyle/>
           <a:p>
-            <a:pPr>
-              <a:spcAft>
-                <a:spcPts val="1000"/>
-              </a:spcAft>
+            <a:pPr lvl="0" marL="457200" indent="-228600">
+              <a:buFont typeface="Calibri"/>
+              <a:spcAft>
+                <a:spcPts val="1000"/>
+              </a:spcAft>
+              <a:buSzPct val="100000"/>
               <a:buChar char="•"/>
               <a:lnSpc>
                 <a:spcPts val="2200"/>
@@ -29990,10 +30642,12 @@
             </a:r>
           </a:p>
           <a:p>
-            <a:pPr>
-              <a:spcAft>
-                <a:spcPts val="1000"/>
-              </a:spcAft>
+            <a:pPr lvl="0" marL="457200" indent="-228600">
+              <a:buFont typeface="Calibri"/>
+              <a:spcAft>
+                <a:spcPts val="1000"/>
+              </a:spcAft>
+              <a:buSzPct val="100000"/>
               <a:buChar char="•"/>
               <a:lnSpc>
                 <a:spcPts val="2200"/>
@@ -30129,10 +30783,12 @@
           </a:bodyPr>
           <a:lstStyle/>
           <a:p>
-            <a:pPr>
-              <a:spcAft>
-                <a:spcPts val="1000"/>
-              </a:spcAft>
+            <a:pPr lvl="0" marL="457200" indent="-228600">
+              <a:buFont typeface="Calibri"/>
+              <a:spcAft>
+                <a:spcPts val="1000"/>
+              </a:spcAft>
+              <a:buSzPct val="100000"/>
               <a:buChar char="•"/>
               <a:lnSpc>
                 <a:spcPts val="2200"/>
@@ -30149,10 +30805,12 @@
             </a:r>
           </a:p>
           <a:p>
-            <a:pPr>
-              <a:spcAft>
-                <a:spcPts val="1000"/>
-              </a:spcAft>
+            <a:pPr lvl="0" marL="457200" indent="-228600">
+              <a:buFont typeface="Calibri"/>
+              <a:spcAft>
+                <a:spcPts val="1000"/>
+              </a:spcAft>
+              <a:buSzPct val="100000"/>
               <a:buChar char="•"/>
               <a:lnSpc>
                 <a:spcPts val="2200"/>
@@ -30288,10 +30946,12 @@
           </a:bodyPr>
           <a:lstStyle/>
           <a:p>
-            <a:pPr>
-              <a:spcAft>
-                <a:spcPts val="1000"/>
-              </a:spcAft>
+            <a:pPr lvl="0" marL="457200" indent="-228600">
+              <a:buFont typeface="Calibri"/>
+              <a:spcAft>
+                <a:spcPts val="1000"/>
+              </a:spcAft>
+              <a:buSzPct val="100000"/>
               <a:buChar char="•"/>
               <a:lnSpc>
                 <a:spcPts val="2200"/>
@@ -30308,10 +30968,12 @@
             </a:r>
           </a:p>
           <a:p>
-            <a:pPr>
-              <a:spcAft>
-                <a:spcPts val="1000"/>
-              </a:spcAft>
+            <a:pPr lvl="0" marL="457200" indent="-228600">
+              <a:buFont typeface="Calibri"/>
+              <a:spcAft>
+                <a:spcPts val="1000"/>
+              </a:spcAft>
+              <a:buSzPct val="100000"/>
               <a:buChar char="•"/>
               <a:lnSpc>
                 <a:spcPts val="2200"/>
@@ -30328,10 +30990,12 @@
             </a:r>
           </a:p>
           <a:p>
-            <a:pPr>
-              <a:spcAft>
-                <a:spcPts val="1000"/>
-              </a:spcAft>
+            <a:pPr lvl="0" marL="457200" indent="-228600">
+              <a:buFont typeface="Calibri"/>
+              <a:spcAft>
+                <a:spcPts val="1000"/>
+              </a:spcAft>
+              <a:buSzPct val="100000"/>
               <a:buChar char="•"/>
               <a:lnSpc>
                 <a:spcPts val="2200"/>
@@ -30348,10 +31012,12 @@
             </a:r>
           </a:p>
           <a:p>
-            <a:pPr>
-              <a:spcAft>
-                <a:spcPts val="1000"/>
-              </a:spcAft>
+            <a:pPr lvl="0" marL="457200" indent="-228600">
+              <a:buFont typeface="Calibri"/>
+              <a:spcAft>
+                <a:spcPts val="1000"/>
+              </a:spcAft>
+              <a:buSzPct val="100000"/>
               <a:buChar char="•"/>
               <a:lnSpc>
                 <a:spcPts val="2200"/>
